--- a/docs/FocusBuddy_PPT.pptx
+++ b/docs/FocusBuddy_PPT.pptx
@@ -15,6 +15,7 @@
     <p:sldId id="263" r:id="rId14"/>
     <p:sldId id="264" r:id="rId15"/>
     <p:sldId id="265" r:id="rId16"/>
+    <p:sldId id="266" r:id="rId17"/>
   </p:sldIdLst>
   <p:sldSz cx="12191695" cy="6858000" type="screen4x3"/>
   <p:notesSz cx="6858000" cy="9144000"/>
@@ -3358,8 +3359,8 @@
         </p:nvSpPr>
         <p:spPr>
           <a:xfrm>
-            <a:off x="457200" y="6217920"/>
-            <a:ext cx="11247120" cy="36576"/>
+            <a:off x="457200" y="274320"/>
+            <a:ext cx="2926080" cy="548640"/>
           </a:xfrm>
           <a:prstGeom prst="roundRect">
             <a:avLst/>
@@ -3402,8 +3403,8 @@
         </p:nvSpPr>
         <p:spPr>
           <a:xfrm>
-            <a:off x="731520" y="1371600"/>
-            <a:ext cx="10058400" cy="914400"/>
+            <a:off x="640080" y="320040"/>
+            <a:ext cx="2743200" cy="457200"/>
           </a:xfrm>
           <a:prstGeom prst="rect">
             <a:avLst/>
@@ -3417,14 +3418,14 @@
           <a:lstStyle/>
           <a:p>
             <a:pPr algn="l">
-              <a:defRPr sz="4200" b="1">
-                <a:solidFill>
-                  <a:srgbClr val="FF6B35"/>
-                </a:solidFill>
-              </a:defRPr>
-            </a:pPr>
-            <a:r>
-              <a:t>Dream Team</a:t>
+              <a:defRPr sz="2200" b="1">
+                <a:solidFill>
+                  <a:srgbClr val="FFFFFF"/>
+                </a:solidFill>
+              </a:defRPr>
+            </a:pPr>
+            <a:r>
+              <a:t>未来规划</a:t>
             </a:r>
           </a:p>
         </p:txBody>
@@ -3437,8 +3438,8 @@
         </p:nvSpPr>
         <p:spPr>
           <a:xfrm>
-            <a:off x="731520" y="2560320"/>
-            <a:ext cx="4572000" cy="548640"/>
+            <a:off x="731520" y="1097280"/>
+            <a:ext cx="10058400" cy="640080"/>
           </a:xfrm>
           <a:prstGeom prst="rect">
             <a:avLst/>
@@ -3454,12 +3455,12 @@
             <a:pPr algn="l">
               <a:defRPr sz="2800" b="1">
                 <a:solidFill>
-                  <a:srgbClr val="E0E0E0"/>
-                </a:solidFill>
-              </a:defRPr>
-            </a:pPr>
-            <a:r>
-              <a:t>Ryan</a:t>
+                  <a:srgbClr val="FF6B35"/>
+                </a:solidFill>
+              </a:defRPr>
+            </a:pPr>
+            <a:r>
+              <a:t>从个人工具到学习生态</a:t>
             </a:r>
           </a:p>
         </p:txBody>
@@ -3472,8 +3473,8 @@
         </p:nvSpPr>
         <p:spPr>
           <a:xfrm>
-            <a:off x="731520" y="3108960"/>
-            <a:ext cx="4572000" cy="457200"/>
+            <a:off x="731520" y="1737360"/>
+            <a:ext cx="6400800" cy="4572000"/>
           </a:xfrm>
           <a:prstGeom prst="rect">
             <a:avLst/>
@@ -3486,29 +3487,192 @@
           </a:bodyPr>
           <a:lstStyle/>
           <a:p>
-            <a:pPr algn="l">
-              <a:defRPr sz="1600" b="0">
-                <a:solidFill>
-                  <a:srgbClr val="8892B0"/>
-                </a:solidFill>
-              </a:defRPr>
-            </a:pPr>
-            <a:r>
-              <a:t>前端开发 · Pomodoro · 统计 · 设置 · UI</a:t>
-            </a:r>
-          </a:p>
-        </p:txBody>
-      </p:sp>
-      <p:sp>
-        <p:nvSpPr>
-          <p:cNvPr id="6" name="TextBox 5"/>
+            <a:pPr>
+              <a:spcAft>
+                <a:spcPts val="600"/>
+              </a:spcAft>
+              <a:defRPr sz="1500">
+                <a:solidFill>
+                  <a:srgbClr val="E0E0E0"/>
+                </a:solidFill>
+              </a:defRPr>
+            </a:pPr>
+            <a:r>
+              <a:t>🌐 多用户联机自习室 — 看到朋友也在专注，互相监督</a:t>
+            </a:r>
+          </a:p>
+          <a:p>
+            <a:pPr>
+              <a:spcAft>
+                <a:spcPts val="600"/>
+              </a:spcAft>
+              <a:defRPr sz="1500">
+                <a:solidFill>
+                  <a:srgbClr val="E0E0E0"/>
+                </a:solidFill>
+              </a:defRPr>
+            </a:pPr>
+            <a:r>
+              <a:t>😪 疲劳检测 — 加入打哈欠检测(MAR)，建议休息</a:t>
+            </a:r>
+          </a:p>
+          <a:p>
+            <a:pPr>
+              <a:spcAft>
+                <a:spcPts val="600"/>
+              </a:spcAft>
+              <a:defRPr sz="1500">
+                <a:solidFill>
+                  <a:srgbClr val="E0E0E0"/>
+                </a:solidFill>
+              </a:defRPr>
+            </a:pPr>
+            <a:r>
+              <a:t>🤖 AI 学习报告 — 每天自动生成专注分析+建议</a:t>
+            </a:r>
+          </a:p>
+          <a:p>
+            <a:pPr>
+              <a:spcAft>
+                <a:spcPts val="600"/>
+              </a:spcAft>
+              <a:defRPr sz="1500">
+                <a:solidFill>
+                  <a:srgbClr val="E0E0E0"/>
+                </a:solidFill>
+              </a:defRPr>
+            </a:pPr>
+            <a:r>
+              <a:t>📱 移动端适配 — 手机+平板上线</a:t>
+            </a:r>
+          </a:p>
+          <a:p>
+            <a:pPr>
+              <a:spcAft>
+                <a:spcPts val="600"/>
+              </a:spcAft>
+              <a:defRPr sz="1500">
+                <a:solidFill>
+                  <a:srgbClr val="E0E0E0"/>
+                </a:solidFill>
+              </a:defRPr>
+            </a:pPr>
+            <a:r>
+              <a:t>🔗 更丰富的硬件联动 — 震动提醒、光线提示</a:t>
+            </a:r>
+          </a:p>
+          <a:p>
+            <a:pPr>
+              <a:spcAft>
+                <a:spcPts val="600"/>
+              </a:spcAft>
+              <a:defRPr sz="1500">
+                <a:solidFill>
+                  <a:srgbClr val="E0E0E0"/>
+                </a:solidFill>
+              </a:defRPr>
+            </a:pPr>
+          </a:p>
+          <a:p>
+            <a:pPr>
+              <a:spcAft>
+                <a:spcPts val="600"/>
+              </a:spcAft>
+              <a:defRPr sz="1500">
+                <a:solidFill>
+                  <a:srgbClr val="E0E0E0"/>
+                </a:solidFill>
+              </a:defRPr>
+            </a:pPr>
+            <a:r>
+              <a:t>🌟 长期愿景：学会推荐引擎 — 根据专注数据推荐最佳学习时段</a:t>
+            </a:r>
+          </a:p>
+          <a:p>
+            <a:pPr>
+              <a:spcAft>
+                <a:spcPts val="600"/>
+              </a:spcAft>
+              <a:defRPr sz="1500">
+                <a:solidFill>
+                  <a:srgbClr val="E0E0E0"/>
+                </a:solidFill>
+              </a:defRPr>
+            </a:pPr>
+          </a:p>
+          <a:p>
+            <a:pPr>
+              <a:spcAft>
+                <a:spcPts val="600"/>
+              </a:spcAft>
+              <a:defRPr sz="1500">
+                <a:solidFill>
+                  <a:srgbClr val="E0E0E0"/>
+                </a:solidFill>
+              </a:defRPr>
+            </a:pPr>
+            <a:r>
+              <a:t>让 FocusBuddy 成为每个人桌面上的专注伙伴 🐱</a:t>
+            </a:r>
+          </a:p>
+        </p:txBody>
+      </p:sp>
+      <p:sp>
+        <p:nvSpPr>
+          <p:cNvPr id="6" name="Rounded Rectangle 5"/>
+          <p:cNvSpPr/>
+          <p:nvPr/>
+        </p:nvSpPr>
+        <p:spPr>
+          <a:xfrm>
+            <a:off x="7498079" y="1371600"/>
+            <a:ext cx="4206240" cy="5029200"/>
+          </a:xfrm>
+          <a:prstGeom prst="roundRect">
+            <a:avLst/>
+          </a:prstGeom>
+          <a:solidFill>
+            <a:srgbClr val="202A44"/>
+          </a:solidFill>
+          <a:ln w="19050">
+            <a:solidFill>
+              <a:srgbClr val="8892B0"/>
+            </a:solidFill>
+          </a:ln>
+          <a:effectLst/>
+        </p:spPr>
+        <p:style>
+          <a:lnRef idx="1">
+            <a:schemeClr val="accent1"/>
+          </a:lnRef>
+          <a:fillRef idx="3">
+            <a:schemeClr val="accent1"/>
+          </a:fillRef>
+          <a:effectRef idx="2">
+            <a:schemeClr val="accent1"/>
+          </a:effectRef>
+          <a:fontRef idx="minor">
+            <a:schemeClr val="lt1"/>
+          </a:fontRef>
+        </p:style>
+        <p:txBody>
+          <a:bodyPr rtlCol="0" anchor="ctr"/>
+          <a:lstStyle/>
+          <a:p>
+            <a:pPr algn="ctr"/>
+          </a:p>
+        </p:txBody>
+      </p:sp>
+      <p:sp>
+        <p:nvSpPr>
+          <p:cNvPr id="7" name="TextBox 6"/>
           <p:cNvSpPr txBox="1"/>
           <p:nvPr/>
         </p:nvSpPr>
         <p:spPr>
           <a:xfrm>
-            <a:off x="731520" y="3840480"/>
-            <a:ext cx="4572000" cy="548640"/>
+            <a:off x="7498079" y="3611880"/>
+            <a:ext cx="4206240" cy="548640"/>
           </a:xfrm>
           <a:prstGeom prst="rect">
             <a:avLst/>
@@ -3521,29 +3685,103 @@
           </a:bodyPr>
           <a:lstStyle/>
           <a:p>
-            <a:pPr algn="l">
-              <a:defRPr sz="2800" b="1">
-                <a:solidFill>
-                  <a:srgbClr val="E0E0E0"/>
-                </a:solidFill>
-              </a:defRPr>
-            </a:pPr>
-            <a:r>
-              <a:t>Vickie</a:t>
-            </a:r>
-          </a:p>
-        </p:txBody>
-      </p:sp>
-      <p:sp>
-        <p:nvSpPr>
-          <p:cNvPr id="7" name="TextBox 6"/>
+            <a:pPr algn="ctr">
+              <a:defRPr sz="1400">
+                <a:solidFill>
+                  <a:srgbClr val="8892B0"/>
+                </a:solidFill>
+              </a:defRPr>
+            </a:pPr>
+            <a:r>
+              <a:t>📸 未来多用户自习室</a:t>
+            </a:r>
+            <a:br/>
+            <a:r>
+              <a:t>概念设计图</a:t>
+            </a:r>
+          </a:p>
+        </p:txBody>
+      </p:sp>
+    </p:spTree>
+  </p:cSld>
+  <p:clrMapOvr>
+    <a:masterClrMapping/>
+  </p:clrMapOvr>
+</p:sld>
+</file>
+
+<file path=ppt/slides/slide11.xml><?xml version="1.0" encoding="utf-8"?>
+<p:sld xmlns:a="http://schemas.openxmlformats.org/drawingml/2006/main" xmlns:p="http://schemas.openxmlformats.org/presentationml/2006/main" xmlns:r="http://schemas.openxmlformats.org/officeDocument/2006/relationships">
+  <p:cSld>
+    <p:bg>
+      <p:bgPr>
+        <a:solidFill>
+          <a:srgbClr val="1A1A2E"/>
+        </a:solidFill>
+        <a:effectLst/>
+      </p:bgPr>
+    </p:bg>
+    <p:spTree>
+      <p:nvGrpSpPr>
+        <p:cNvPr id="1" name=""/>
+        <p:cNvGrpSpPr/>
+        <p:nvPr/>
+      </p:nvGrpSpPr>
+      <p:grpSpPr/>
+      <p:sp>
+        <p:nvSpPr>
+          <p:cNvPr id="2" name="Rounded Rectangle 1"/>
+          <p:cNvSpPr/>
+          <p:nvPr/>
+        </p:nvSpPr>
+        <p:spPr>
+          <a:xfrm>
+            <a:off x="457200" y="6217920"/>
+            <a:ext cx="11247120" cy="36576"/>
+          </a:xfrm>
+          <a:prstGeom prst="roundRect">
+            <a:avLst/>
+          </a:prstGeom>
+          <a:solidFill>
+            <a:srgbClr val="FF6B35"/>
+          </a:solidFill>
+          <a:ln>
+            <a:noFill/>
+          </a:ln>
+          <a:effectLst/>
+        </p:spPr>
+        <p:style>
+          <a:lnRef idx="1">
+            <a:schemeClr val="accent1"/>
+          </a:lnRef>
+          <a:fillRef idx="3">
+            <a:schemeClr val="accent1"/>
+          </a:fillRef>
+          <a:effectRef idx="2">
+            <a:schemeClr val="accent1"/>
+          </a:effectRef>
+          <a:fontRef idx="minor">
+            <a:schemeClr val="lt1"/>
+          </a:fontRef>
+        </p:style>
+        <p:txBody>
+          <a:bodyPr rtlCol="0" anchor="ctr"/>
+          <a:lstStyle/>
+          <a:p>
+            <a:pPr algn="ctr"/>
+          </a:p>
+        </p:txBody>
+      </p:sp>
+      <p:sp>
+        <p:nvSpPr>
+          <p:cNvPr id="3" name="TextBox 2"/>
           <p:cNvSpPr txBox="1"/>
           <p:nvPr/>
         </p:nvSpPr>
         <p:spPr>
           <a:xfrm>
-            <a:off x="731520" y="4389120"/>
-            <a:ext cx="4572000" cy="457200"/>
+            <a:off x="731520" y="1097280"/>
+            <a:ext cx="10058400" cy="731520"/>
           </a:xfrm>
           <a:prstGeom prst="rect">
             <a:avLst/>
@@ -3557,28 +3795,28 @@
           <a:lstStyle/>
           <a:p>
             <a:pPr algn="l">
-              <a:defRPr sz="1600" b="0">
-                <a:solidFill>
-                  <a:srgbClr val="8892B0"/>
-                </a:solidFill>
-              </a:defRPr>
-            </a:pPr>
-            <a:r>
-              <a:t>FaceMesh算法 · ESP32固件 · 主状态机 · 集成</a:t>
-            </a:r>
-          </a:p>
-        </p:txBody>
-      </p:sp>
-      <p:sp>
-        <p:nvSpPr>
-          <p:cNvPr id="8" name="TextBox 7"/>
+              <a:defRPr sz="4200" b="1">
+                <a:solidFill>
+                  <a:srgbClr val="FF6B35"/>
+                </a:solidFill>
+              </a:defRPr>
+            </a:pPr>
+            <a:r>
+              <a:t>Dream Team</a:t>
+            </a:r>
+          </a:p>
+        </p:txBody>
+      </p:sp>
+      <p:sp>
+        <p:nvSpPr>
+          <p:cNvPr id="4" name="TextBox 3"/>
           <p:cNvSpPr txBox="1"/>
           <p:nvPr/>
         </p:nvSpPr>
         <p:spPr>
           <a:xfrm>
-            <a:off x="731520" y="5303520"/>
-            <a:ext cx="10058400" cy="457200"/>
+            <a:off x="731520" y="2194560"/>
+            <a:ext cx="4572000" cy="548640"/>
           </a:xfrm>
           <a:prstGeom prst="rect">
             <a:avLst/>
@@ -3592,28 +3830,28 @@
           <a:lstStyle/>
           <a:p>
             <a:pPr algn="l">
-              <a:defRPr sz="1400" b="0">
-                <a:solidFill>
-                  <a:srgbClr val="8892B0"/>
-                </a:solidFill>
-              </a:defRPr>
-            </a:pPr>
-            <a:r>
-              <a:t>github.com/Sapnap67/FocusBuddy</a:t>
-            </a:r>
-          </a:p>
-        </p:txBody>
-      </p:sp>
-      <p:sp>
-        <p:nvSpPr>
-          <p:cNvPr id="9" name="TextBox 8"/>
+              <a:defRPr sz="2800" b="1">
+                <a:solidFill>
+                  <a:srgbClr val="E0E0E0"/>
+                </a:solidFill>
+              </a:defRPr>
+            </a:pPr>
+            <a:r>
+              <a:t>Ryan</a:t>
+            </a:r>
+          </a:p>
+        </p:txBody>
+      </p:sp>
+      <p:sp>
+        <p:nvSpPr>
+          <p:cNvPr id="5" name="TextBox 4"/>
           <p:cNvSpPr txBox="1"/>
           <p:nvPr/>
         </p:nvSpPr>
         <p:spPr>
           <a:xfrm>
-            <a:off x="731520" y="5669280"/>
-            <a:ext cx="10058400" cy="457200"/>
+            <a:off x="731520" y="2743200"/>
+            <a:ext cx="4572000" cy="457200"/>
           </a:xfrm>
           <a:prstGeom prst="rect">
             <a:avLst/>
@@ -3627,6 +3865,227 @@
           <a:lstStyle/>
           <a:p>
             <a:pPr algn="l">
+              <a:defRPr sz="1600" b="0">
+                <a:solidFill>
+                  <a:srgbClr val="8892B0"/>
+                </a:solidFill>
+              </a:defRPr>
+            </a:pPr>
+            <a:r>
+              <a:t>前端开发 · Pomodoro · 统计 · 设置 · UI</a:t>
+            </a:r>
+          </a:p>
+        </p:txBody>
+      </p:sp>
+      <p:sp>
+        <p:nvSpPr>
+          <p:cNvPr id="6" name="TextBox 5"/>
+          <p:cNvSpPr txBox="1"/>
+          <p:nvPr/>
+        </p:nvSpPr>
+        <p:spPr>
+          <a:xfrm>
+            <a:off x="731520" y="3474720"/>
+            <a:ext cx="4572000" cy="548640"/>
+          </a:xfrm>
+          <a:prstGeom prst="rect">
+            <a:avLst/>
+          </a:prstGeom>
+          <a:noFill/>
+        </p:spPr>
+        <p:txBody>
+          <a:bodyPr wrap="square">
+            <a:spAutoFit/>
+          </a:bodyPr>
+          <a:lstStyle/>
+          <a:p>
+            <a:pPr algn="l">
+              <a:defRPr sz="2800" b="1">
+                <a:solidFill>
+                  <a:srgbClr val="E0E0E0"/>
+                </a:solidFill>
+              </a:defRPr>
+            </a:pPr>
+            <a:r>
+              <a:t>Vickie</a:t>
+            </a:r>
+          </a:p>
+        </p:txBody>
+      </p:sp>
+      <p:sp>
+        <p:nvSpPr>
+          <p:cNvPr id="7" name="TextBox 6"/>
+          <p:cNvSpPr txBox="1"/>
+          <p:nvPr/>
+        </p:nvSpPr>
+        <p:spPr>
+          <a:xfrm>
+            <a:off x="731520" y="4023360"/>
+            <a:ext cx="4572000" cy="457200"/>
+          </a:xfrm>
+          <a:prstGeom prst="rect">
+            <a:avLst/>
+          </a:prstGeom>
+          <a:noFill/>
+        </p:spPr>
+        <p:txBody>
+          <a:bodyPr wrap="square">
+            <a:spAutoFit/>
+          </a:bodyPr>
+          <a:lstStyle/>
+          <a:p>
+            <a:pPr algn="l">
+              <a:defRPr sz="1600" b="0">
+                <a:solidFill>
+                  <a:srgbClr val="8892B0"/>
+                </a:solidFill>
+              </a:defRPr>
+            </a:pPr>
+            <a:r>
+              <a:t>FaceMesh算法 · ESP32固件 · 主状态机 · 集成</a:t>
+            </a:r>
+          </a:p>
+        </p:txBody>
+      </p:sp>
+      <p:sp>
+        <p:nvSpPr>
+          <p:cNvPr id="8" name="Rounded Rectangle 7"/>
+          <p:cNvSpPr/>
+          <p:nvPr/>
+        </p:nvSpPr>
+        <p:spPr>
+          <a:xfrm>
+            <a:off x="6400800" y="1828800"/>
+            <a:ext cx="5303520" cy="3840480"/>
+          </a:xfrm>
+          <a:prstGeom prst="roundRect">
+            <a:avLst/>
+          </a:prstGeom>
+          <a:solidFill>
+            <a:srgbClr val="202A44"/>
+          </a:solidFill>
+          <a:ln w="19050">
+            <a:solidFill>
+              <a:srgbClr val="8892B0"/>
+            </a:solidFill>
+          </a:ln>
+          <a:effectLst/>
+        </p:spPr>
+        <p:style>
+          <a:lnRef idx="1">
+            <a:schemeClr val="accent1"/>
+          </a:lnRef>
+          <a:fillRef idx="3">
+            <a:schemeClr val="accent1"/>
+          </a:fillRef>
+          <a:effectRef idx="2">
+            <a:schemeClr val="accent1"/>
+          </a:effectRef>
+          <a:fontRef idx="minor">
+            <a:schemeClr val="lt1"/>
+          </a:fontRef>
+        </p:style>
+        <p:txBody>
+          <a:bodyPr rtlCol="0" anchor="ctr"/>
+          <a:lstStyle/>
+          <a:p>
+            <a:pPr algn="ctr"/>
+          </a:p>
+        </p:txBody>
+      </p:sp>
+      <p:sp>
+        <p:nvSpPr>
+          <p:cNvPr id="9" name="TextBox 8"/>
+          <p:cNvSpPr txBox="1"/>
+          <p:nvPr/>
+        </p:nvSpPr>
+        <p:spPr>
+          <a:xfrm>
+            <a:off x="6400800" y="3474720"/>
+            <a:ext cx="5303520" cy="548640"/>
+          </a:xfrm>
+          <a:prstGeom prst="rect">
+            <a:avLst/>
+          </a:prstGeom>
+          <a:noFill/>
+        </p:spPr>
+        <p:txBody>
+          <a:bodyPr wrap="square">
+            <a:spAutoFit/>
+          </a:bodyPr>
+          <a:lstStyle/>
+          <a:p>
+            <a:pPr algn="ctr">
+              <a:defRPr sz="1400">
+                <a:solidFill>
+                  <a:srgbClr val="8892B0"/>
+                </a:solidFill>
+              </a:defRPr>
+            </a:pPr>
+            <a:r>
+              <a:t>📸 团队合影 / 项目合照</a:t>
+            </a:r>
+          </a:p>
+        </p:txBody>
+      </p:sp>
+      <p:sp>
+        <p:nvSpPr>
+          <p:cNvPr id="10" name="TextBox 9"/>
+          <p:cNvSpPr txBox="1"/>
+          <p:nvPr/>
+        </p:nvSpPr>
+        <p:spPr>
+          <a:xfrm>
+            <a:off x="731520" y="4937760"/>
+            <a:ext cx="10058400" cy="457200"/>
+          </a:xfrm>
+          <a:prstGeom prst="rect">
+            <a:avLst/>
+          </a:prstGeom>
+          <a:noFill/>
+        </p:spPr>
+        <p:txBody>
+          <a:bodyPr wrap="square">
+            <a:spAutoFit/>
+          </a:bodyPr>
+          <a:lstStyle/>
+          <a:p>
+            <a:pPr algn="l">
+              <a:defRPr sz="1400" b="0">
+                <a:solidFill>
+                  <a:srgbClr val="8892B0"/>
+                </a:solidFill>
+              </a:defRPr>
+            </a:pPr>
+            <a:r>
+              <a:t>github.com/Sapnap67/FocusBuddy</a:t>
+            </a:r>
+          </a:p>
+        </p:txBody>
+      </p:sp>
+      <p:sp>
+        <p:nvSpPr>
+          <p:cNvPr id="11" name="TextBox 10"/>
+          <p:cNvSpPr txBox="1"/>
+          <p:nvPr/>
+        </p:nvSpPr>
+        <p:spPr>
+          <a:xfrm>
+            <a:off x="731520" y="5394960"/>
+            <a:ext cx="10058400" cy="457200"/>
+          </a:xfrm>
+          <a:prstGeom prst="rect">
+            <a:avLst/>
+          </a:prstGeom>
+          <a:noFill/>
+        </p:spPr>
+        <p:txBody>
+          <a:bodyPr wrap="square">
+            <a:spAutoFit/>
+          </a:bodyPr>
+          <a:lstStyle/>
+          <a:p>
+            <a:pPr algn="l">
               <a:defRPr sz="2000" b="1">
                 <a:solidFill>
                   <a:srgbClr val="FF6B35"/>
@@ -3635,6 +4094,41 @@
             </a:pPr>
             <a:r>
               <a:t>🐱 感谢评委老师和 HHCC 2026！</a:t>
+            </a:r>
+          </a:p>
+        </p:txBody>
+      </p:sp>
+      <p:sp>
+        <p:nvSpPr>
+          <p:cNvPr id="12" name="TextBox 11"/>
+          <p:cNvSpPr txBox="1"/>
+          <p:nvPr/>
+        </p:nvSpPr>
+        <p:spPr>
+          <a:xfrm>
+            <a:off x="731520" y="5760720"/>
+            <a:ext cx="10058400" cy="365760"/>
+          </a:xfrm>
+          <a:prstGeom prst="rect">
+            <a:avLst/>
+          </a:prstGeom>
+          <a:noFill/>
+        </p:spPr>
+        <p:txBody>
+          <a:bodyPr wrap="square">
+            <a:spAutoFit/>
+          </a:bodyPr>
+          <a:lstStyle/>
+          <a:p>
+            <a:pPr algn="l">
+              <a:defRPr sz="1200" b="0">
+                <a:solidFill>
+                  <a:srgbClr val="8892B0"/>
+                </a:solidFill>
+              </a:defRPr>
+            </a:pPr>
+            <a:r>
+              <a:t>Made with ❤️ by Dream Team · 2026</a:t>
             </a:r>
           </a:p>
         </p:txBody>
@@ -3788,7 +4282,7 @@
         <p:spPr>
           <a:xfrm>
             <a:off x="731520" y="2377440"/>
-            <a:ext cx="10515600" cy="4114800"/>
+            <a:ext cx="10515600" cy="4572000"/>
           </a:xfrm>
           <a:prstGeom prst="rect">
             <a:avLst/>
@@ -3803,7 +4297,7 @@
           <a:p>
             <a:pPr>
               <a:spcAft>
-                <a:spcPts val="800"/>
+                <a:spcPts val="600"/>
               </a:spcAft>
               <a:defRPr sz="1600">
                 <a:solidFill>
@@ -3818,7 +4312,7 @@
           <a:p>
             <a:pPr>
               <a:spcAft>
-                <a:spcPts val="800"/>
+                <a:spcPts val="600"/>
               </a:spcAft>
               <a:defRPr sz="1600">
                 <a:solidFill>
@@ -3833,7 +4327,7 @@
           <a:p>
             <a:pPr>
               <a:spcAft>
-                <a:spcPts val="800"/>
+                <a:spcPts val="600"/>
               </a:spcAft>
               <a:defRPr sz="1600">
                 <a:solidFill>
@@ -3848,7 +4342,7 @@
           <a:p>
             <a:pPr>
               <a:spcAft>
-                <a:spcPts val="800"/>
+                <a:spcPts val="600"/>
               </a:spcAft>
               <a:defRPr sz="1600">
                 <a:solidFill>
@@ -3863,7 +4357,7 @@
           <a:p>
             <a:pPr>
               <a:spcAft>
-                <a:spcPts val="800"/>
+                <a:spcPts val="600"/>
               </a:spcAft>
               <a:defRPr sz="1600">
                 <a:solidFill>
@@ -3875,7 +4369,7 @@
           <a:p>
             <a:pPr>
               <a:spcAft>
-                <a:spcPts val="800"/>
+                <a:spcPts val="600"/>
               </a:spcAft>
               <a:defRPr sz="1600">
                 <a:solidFill>
@@ -3890,7 +4384,7 @@
           <a:p>
             <a:pPr>
               <a:spcAft>
-                <a:spcPts val="800"/>
+                <a:spcPts val="600"/>
               </a:spcAft>
               <a:defRPr sz="1600">
                 <a:solidFill>
@@ -4052,8 +4546,8 @@
         </p:nvSpPr>
         <p:spPr>
           <a:xfrm>
-            <a:off x="457200" y="2377440"/>
-            <a:ext cx="3474720" cy="1097280"/>
+            <a:off x="457200" y="2194560"/>
+            <a:ext cx="3474720" cy="1280160"/>
           </a:xfrm>
           <a:prstGeom prst="roundRect">
             <a:avLst/>
@@ -4096,8 +4590,8 @@
         </p:nvSpPr>
         <p:spPr>
           <a:xfrm>
-            <a:off x="640080" y="2468880"/>
-            <a:ext cx="3108960" cy="457200"/>
+            <a:off x="640080" y="2331720"/>
+            <a:ext cx="3108960" cy="365760"/>
           </a:xfrm>
           <a:prstGeom prst="rect">
             <a:avLst/>
@@ -4111,7 +4605,7 @@
           <a:lstStyle/>
           <a:p>
             <a:pPr algn="l">
-              <a:defRPr sz="1800" b="1">
+              <a:defRPr sz="1700" b="1">
                 <a:solidFill>
                   <a:srgbClr val="F39C12"/>
                 </a:solidFill>
@@ -4131,8 +4625,8 @@
         </p:nvSpPr>
         <p:spPr>
           <a:xfrm>
-            <a:off x="640080" y="2880360"/>
-            <a:ext cx="3108960" cy="548640"/>
+            <a:off x="640080" y="2697480"/>
+            <a:ext cx="3108960" cy="640080"/>
           </a:xfrm>
           <a:prstGeom prst="rect">
             <a:avLst/>
@@ -4146,7 +4640,7 @@
           <a:lstStyle/>
           <a:p>
             <a:pPr algn="l">
-              <a:defRPr sz="1400" b="0">
+              <a:defRPr sz="1300" b="0">
                 <a:solidFill>
                   <a:srgbClr val="E0E0E0"/>
                 </a:solidFill>
@@ -4157,7 +4651,7 @@
             </a:r>
             <a:br/>
             <a:r>
-              <a:t>面部朝向 + 闭眼 + 转头</a:t>
+              <a:t>→ 面部朝向 + 闭眼 + 转头</a:t>
             </a:r>
           </a:p>
         </p:txBody>
@@ -4170,8 +4664,8 @@
         </p:nvSpPr>
         <p:spPr>
           <a:xfrm>
-            <a:off x="4389120" y="2377440"/>
-            <a:ext cx="3474720" cy="1097280"/>
+            <a:off x="4389120" y="2194560"/>
+            <a:ext cx="3474720" cy="1280160"/>
           </a:xfrm>
           <a:prstGeom prst="roundRect">
             <a:avLst/>
@@ -4214,8 +4708,8 @@
         </p:nvSpPr>
         <p:spPr>
           <a:xfrm>
-            <a:off x="4572000" y="2468880"/>
-            <a:ext cx="3108960" cy="457200"/>
+            <a:off x="4572000" y="2331720"/>
+            <a:ext cx="3108960" cy="365760"/>
           </a:xfrm>
           <a:prstGeom prst="rect">
             <a:avLst/>
@@ -4229,7 +4723,7 @@
           <a:lstStyle/>
           <a:p>
             <a:pPr algn="l">
-              <a:defRPr sz="1800" b="1">
+              <a:defRPr sz="1700" b="1">
                 <a:solidFill>
                   <a:srgbClr val="3498DB"/>
                 </a:solidFill>
@@ -4249,8 +4743,8 @@
         </p:nvSpPr>
         <p:spPr>
           <a:xfrm>
-            <a:off x="4572000" y="2880360"/>
-            <a:ext cx="3108960" cy="548640"/>
+            <a:off x="4572000" y="2697480"/>
+            <a:ext cx="3108960" cy="640080"/>
           </a:xfrm>
           <a:prstGeom prst="rect">
             <a:avLst/>
@@ -4264,14 +4758,14 @@
           <a:lstStyle/>
           <a:p>
             <a:pPr algn="l">
-              <a:defRPr sz="1400" b="0">
+              <a:defRPr sz="1300" b="0">
                 <a:solidFill>
                   <a:srgbClr val="E0E0E0"/>
                 </a:solidFill>
               </a:defRPr>
             </a:pPr>
             <a:r>
-              <a:t>专注 🟢  /  走神 🟡  /  离开 🔴</a:t>
+              <a:t>专注 🟢 / 走神 🟡 / 离开 🔴</a:t>
             </a:r>
           </a:p>
         </p:txBody>
@@ -4284,8 +4778,8 @@
         </p:nvSpPr>
         <p:spPr>
           <a:xfrm>
-            <a:off x="8321040" y="2377440"/>
-            <a:ext cx="3474720" cy="1097280"/>
+            <a:off x="8321040" y="2194560"/>
+            <a:ext cx="3474720" cy="1280160"/>
           </a:xfrm>
           <a:prstGeom prst="roundRect">
             <a:avLst/>
@@ -4328,8 +4822,8 @@
         </p:nvSpPr>
         <p:spPr>
           <a:xfrm>
-            <a:off x="8503920" y="2468880"/>
-            <a:ext cx="3108960" cy="457200"/>
+            <a:off x="8503920" y="2331720"/>
+            <a:ext cx="3108960" cy="365760"/>
           </a:xfrm>
           <a:prstGeom prst="rect">
             <a:avLst/>
@@ -4343,7 +4837,7 @@
           <a:lstStyle/>
           <a:p>
             <a:pPr algn="l">
-              <a:defRPr sz="1800" b="1">
+              <a:defRPr sz="1700" b="1">
                 <a:solidFill>
                   <a:srgbClr val="27AE60"/>
                 </a:solidFill>
@@ -4363,8 +4857,8 @@
         </p:nvSpPr>
         <p:spPr>
           <a:xfrm>
-            <a:off x="8503920" y="2880360"/>
-            <a:ext cx="3108960" cy="548640"/>
+            <a:off x="8503920" y="2697480"/>
+            <a:ext cx="3108960" cy="640080"/>
           </a:xfrm>
           <a:prstGeom prst="rect">
             <a:avLst/>
@@ -4378,7 +4872,7 @@
           <a:lstStyle/>
           <a:p>
             <a:pPr algn="l">
-              <a:defRPr sz="1400" b="0">
+              <a:defRPr sz="1300" b="0">
                 <a:solidFill>
                   <a:srgbClr val="E0E0E0"/>
                 </a:solidFill>
@@ -4398,8 +4892,8 @@
         </p:nvSpPr>
         <p:spPr>
           <a:xfrm>
-            <a:off x="731520" y="3840480"/>
-            <a:ext cx="10515600" cy="4114800"/>
+            <a:off x="731520" y="3749039"/>
+            <a:ext cx="10515600" cy="4572000"/>
           </a:xfrm>
           <a:prstGeom prst="rect">
             <a:avLst/>
@@ -4414,9 +4908,9 @@
           <a:p>
             <a:pPr>
               <a:spcAft>
-                <a:spcPts val="800"/>
+                <a:spcPts val="600"/>
               </a:spcAft>
-              <a:defRPr sz="1600">
+              <a:defRPr sz="1500">
                 <a:solidFill>
                   <a:srgbClr val="E0E0E0"/>
                 </a:solidFill>
@@ -4429,9 +4923,9 @@
           <a:p>
             <a:pPr>
               <a:spcAft>
-                <a:spcPts val="800"/>
+                <a:spcPts val="600"/>
               </a:spcAft>
-              <a:defRPr sz="1600">
+              <a:defRPr sz="1500">
                 <a:solidFill>
                   <a:srgbClr val="E0E0E0"/>
                 </a:solidFill>
@@ -4444,9 +4938,9 @@
           <a:p>
             <a:pPr>
               <a:spcAft>
-                <a:spcPts val="800"/>
+                <a:spcPts val="600"/>
               </a:spcAft>
-              <a:defRPr sz="1600">
+              <a:defRPr sz="1500">
                 <a:solidFill>
                   <a:srgbClr val="E0E0E0"/>
                 </a:solidFill>
@@ -4454,6 +4948,87 @@
             </a:pPr>
             <a:r>
               <a:t>▸ 两者联动形成闭环：检测 → 反馈 → 激励</a:t>
+            </a:r>
+          </a:p>
+        </p:txBody>
+      </p:sp>
+      <p:sp>
+        <p:nvSpPr>
+          <p:cNvPr id="15" name="Rounded Rectangle 14"/>
+          <p:cNvSpPr/>
+          <p:nvPr/>
+        </p:nvSpPr>
+        <p:spPr>
+          <a:xfrm>
+            <a:off x="731520" y="4389120"/>
+            <a:ext cx="10515600" cy="2011680"/>
+          </a:xfrm>
+          <a:prstGeom prst="roundRect">
+            <a:avLst/>
+          </a:prstGeom>
+          <a:solidFill>
+            <a:srgbClr val="202A44"/>
+          </a:solidFill>
+          <a:ln w="19050">
+            <a:solidFill>
+              <a:srgbClr val="8892B0"/>
+            </a:solidFill>
+          </a:ln>
+          <a:effectLst/>
+        </p:spPr>
+        <p:style>
+          <a:lnRef idx="1">
+            <a:schemeClr val="accent1"/>
+          </a:lnRef>
+          <a:fillRef idx="3">
+            <a:schemeClr val="accent1"/>
+          </a:fillRef>
+          <a:effectRef idx="2">
+            <a:schemeClr val="accent1"/>
+          </a:effectRef>
+          <a:fontRef idx="minor">
+            <a:schemeClr val="lt1"/>
+          </a:fontRef>
+        </p:style>
+        <p:txBody>
+          <a:bodyPr rtlCol="0" anchor="ctr"/>
+          <a:lstStyle/>
+          <a:p>
+            <a:pPr algn="ctr"/>
+          </a:p>
+        </p:txBody>
+      </p:sp>
+      <p:sp>
+        <p:nvSpPr>
+          <p:cNvPr id="16" name="TextBox 15"/>
+          <p:cNvSpPr txBox="1"/>
+          <p:nvPr/>
+        </p:nvSpPr>
+        <p:spPr>
+          <a:xfrm>
+            <a:off x="731520" y="5120640"/>
+            <a:ext cx="10515600" cy="548640"/>
+          </a:xfrm>
+          <a:prstGeom prst="rect">
+            <a:avLst/>
+          </a:prstGeom>
+          <a:noFill/>
+        </p:spPr>
+        <p:txBody>
+          <a:bodyPr wrap="square">
+            <a:spAutoFit/>
+          </a:bodyPr>
+          <a:lstStyle/>
+          <a:p>
+            <a:pPr algn="ctr">
+              <a:defRPr sz="1400">
+                <a:solidFill>
+                  <a:srgbClr val="8892B0"/>
+                </a:solidFill>
+              </a:defRPr>
+            </a:pPr>
+            <a:r>
+              <a:t>📸 系统闭环流程图（检测 → 判定 → 反馈 → 激励）</a:t>
             </a:r>
           </a:p>
         </p:txBody>
@@ -4571,8 +5146,8 @@
         </p:nvSpPr>
         <p:spPr>
           <a:xfrm>
-            <a:off x="731520" y="1188720"/>
-            <a:ext cx="10058400" cy="640080"/>
+            <a:off x="731520" y="1097280"/>
+            <a:ext cx="10058400" cy="548640"/>
           </a:xfrm>
           <a:prstGeom prst="rect">
             <a:avLst/>
@@ -4606,8 +5181,8 @@
         </p:nvSpPr>
         <p:spPr>
           <a:xfrm>
-            <a:off x="731520" y="1828800"/>
-            <a:ext cx="10515600" cy="4114800"/>
+            <a:off x="731520" y="1645920"/>
+            <a:ext cx="5943600" cy="4572000"/>
           </a:xfrm>
           <a:prstGeom prst="rect">
             <a:avLst/>
@@ -4622,9 +5197,9 @@
           <a:p>
             <a:pPr>
               <a:spcAft>
-                <a:spcPts val="800"/>
+                <a:spcPts val="600"/>
               </a:spcAft>
-              <a:defRPr sz="1600">
+              <a:defRPr sz="1400">
                 <a:solidFill>
                   <a:srgbClr val="E0E0E0"/>
                 </a:solidFill>
@@ -4637,9 +5212,9 @@
           <a:p>
             <a:pPr>
               <a:spcAft>
-                <a:spcPts val="800"/>
+                <a:spcPts val="600"/>
               </a:spcAft>
-              <a:defRPr sz="1600">
+              <a:defRPr sz="1400">
                 <a:solidFill>
                   <a:srgbClr val="E0E0E0"/>
                 </a:solidFill>
@@ -4652,9 +5227,9 @@
           <a:p>
             <a:pPr>
               <a:spcAft>
-                <a:spcPts val="800"/>
+                <a:spcPts val="600"/>
               </a:spcAft>
-              <a:defRPr sz="1600">
+              <a:defRPr sz="1400">
                 <a:solidFill>
                   <a:srgbClr val="E0E0E0"/>
                 </a:solidFill>
@@ -4667,9 +5242,9 @@
           <a:p>
             <a:pPr>
               <a:spcAft>
-                <a:spcPts val="800"/>
+                <a:spcPts val="600"/>
               </a:spcAft>
-              <a:defRPr sz="1600">
+              <a:defRPr sz="1400">
                 <a:solidFill>
                   <a:srgbClr val="E0E0E0"/>
                 </a:solidFill>
@@ -4682,9 +5257,9 @@
           <a:p>
             <a:pPr>
               <a:spcAft>
-                <a:spcPts val="800"/>
+                <a:spcPts val="600"/>
               </a:spcAft>
-              <a:defRPr sz="1600">
+              <a:defRPr sz="1400">
                 <a:solidFill>
                   <a:srgbClr val="E0E0E0"/>
                 </a:solidFill>
@@ -4697,9 +5272,9 @@
           <a:p>
             <a:pPr>
               <a:spcAft>
-                <a:spcPts val="800"/>
+                <a:spcPts val="600"/>
               </a:spcAft>
-              <a:defRPr sz="1600">
+              <a:defRPr sz="1400">
                 <a:solidFill>
                   <a:srgbClr val="E0E0E0"/>
                 </a:solidFill>
@@ -4712,9 +5287,9 @@
           <a:p>
             <a:pPr>
               <a:spcAft>
-                <a:spcPts val="800"/>
+                <a:spcPts val="600"/>
               </a:spcAft>
-              <a:defRPr sz="1600">
+              <a:defRPr sz="1400">
                 <a:solidFill>
                   <a:srgbClr val="E0E0E0"/>
                 </a:solidFill>
@@ -4722,6 +5297,176 @@
             </a:pPr>
             <a:r>
               <a:t>⑦ 番茄完成 → 🎉 庆祝动画 + 桌面通知 + ⭐ 计数 + 音效</a:t>
+            </a:r>
+          </a:p>
+        </p:txBody>
+      </p:sp>
+      <p:sp>
+        <p:nvSpPr>
+          <p:cNvPr id="6" name="Rounded Rectangle 5"/>
+          <p:cNvSpPr/>
+          <p:nvPr/>
+        </p:nvSpPr>
+        <p:spPr>
+          <a:xfrm>
+            <a:off x="7132320" y="1097280"/>
+            <a:ext cx="4572000" cy="2651760"/>
+          </a:xfrm>
+          <a:prstGeom prst="roundRect">
+            <a:avLst/>
+          </a:prstGeom>
+          <a:solidFill>
+            <a:srgbClr val="202A44"/>
+          </a:solidFill>
+          <a:ln w="19050">
+            <a:solidFill>
+              <a:srgbClr val="8892B0"/>
+            </a:solidFill>
+          </a:ln>
+          <a:effectLst/>
+        </p:spPr>
+        <p:style>
+          <a:lnRef idx="1">
+            <a:schemeClr val="accent1"/>
+          </a:lnRef>
+          <a:fillRef idx="3">
+            <a:schemeClr val="accent1"/>
+          </a:fillRef>
+          <a:effectRef idx="2">
+            <a:schemeClr val="accent1"/>
+          </a:effectRef>
+          <a:fontRef idx="minor">
+            <a:schemeClr val="lt1"/>
+          </a:fontRef>
+        </p:style>
+        <p:txBody>
+          <a:bodyPr rtlCol="0" anchor="ctr"/>
+          <a:lstStyle/>
+          <a:p>
+            <a:pPr algn="ctr"/>
+          </a:p>
+        </p:txBody>
+      </p:sp>
+      <p:sp>
+        <p:nvSpPr>
+          <p:cNvPr id="7" name="TextBox 6"/>
+          <p:cNvSpPr txBox="1"/>
+          <p:nvPr/>
+        </p:nvSpPr>
+        <p:spPr>
+          <a:xfrm>
+            <a:off x="7132320" y="2148840"/>
+            <a:ext cx="4572000" cy="548640"/>
+          </a:xfrm>
+          <a:prstGeom prst="rect">
+            <a:avLst/>
+          </a:prstGeom>
+          <a:noFill/>
+        </p:spPr>
+        <p:txBody>
+          <a:bodyPr wrap="square">
+            <a:spAutoFit/>
+          </a:bodyPr>
+          <a:lstStyle/>
+          <a:p>
+            <a:pPr algn="ctr">
+              <a:defRPr sz="1400">
+                <a:solidFill>
+                  <a:srgbClr val="8892B0"/>
+                </a:solidFill>
+              </a:defRPr>
+            </a:pPr>
+            <a:r>
+              <a:t>📸 主界面截图</a:t>
+            </a:r>
+            <a:br/>
+            <a:r>
+              <a:t>(摄像头 + 番茄钟 + 宠物)</a:t>
+            </a:r>
+          </a:p>
+        </p:txBody>
+      </p:sp>
+      <p:sp>
+        <p:nvSpPr>
+          <p:cNvPr id="8" name="Rounded Rectangle 7"/>
+          <p:cNvSpPr/>
+          <p:nvPr/>
+        </p:nvSpPr>
+        <p:spPr>
+          <a:xfrm>
+            <a:off x="7132320" y="3931920"/>
+            <a:ext cx="4572000" cy="2560320"/>
+          </a:xfrm>
+          <a:prstGeom prst="roundRect">
+            <a:avLst/>
+          </a:prstGeom>
+          <a:solidFill>
+            <a:srgbClr val="202A44"/>
+          </a:solidFill>
+          <a:ln w="19050">
+            <a:solidFill>
+              <a:srgbClr val="8892B0"/>
+            </a:solidFill>
+          </a:ln>
+          <a:effectLst/>
+        </p:spPr>
+        <p:style>
+          <a:lnRef idx="1">
+            <a:schemeClr val="accent1"/>
+          </a:lnRef>
+          <a:fillRef idx="3">
+            <a:schemeClr val="accent1"/>
+          </a:fillRef>
+          <a:effectRef idx="2">
+            <a:schemeClr val="accent1"/>
+          </a:effectRef>
+          <a:fontRef idx="minor">
+            <a:schemeClr val="lt1"/>
+          </a:fontRef>
+        </p:style>
+        <p:txBody>
+          <a:bodyPr rtlCol="0" anchor="ctr"/>
+          <a:lstStyle/>
+          <a:p>
+            <a:pPr algn="ctr"/>
+          </a:p>
+        </p:txBody>
+      </p:sp>
+      <p:sp>
+        <p:nvSpPr>
+          <p:cNvPr id="9" name="TextBox 8"/>
+          <p:cNvSpPr txBox="1"/>
+          <p:nvPr/>
+        </p:nvSpPr>
+        <p:spPr>
+          <a:xfrm>
+            <a:off x="7132320" y="4937760"/>
+            <a:ext cx="4572000" cy="548640"/>
+          </a:xfrm>
+          <a:prstGeom prst="rect">
+            <a:avLst/>
+          </a:prstGeom>
+          <a:noFill/>
+        </p:spPr>
+        <p:txBody>
+          <a:bodyPr wrap="square">
+            <a:spAutoFit/>
+          </a:bodyPr>
+          <a:lstStyle/>
+          <a:p>
+            <a:pPr algn="ctr">
+              <a:defRPr sz="1400">
+                <a:solidFill>
+                  <a:srgbClr val="8892B0"/>
+                </a:solidFill>
+              </a:defRPr>
+            </a:pPr>
+            <a:r>
+              <a:t>📸 统计数据截图</a:t>
+            </a:r>
+            <a:br/>
+            <a:r>
+              <a:t>(饼图 + 柱状图 + 今日计划)</a:t>
             </a:r>
           </a:p>
         </p:txBody>
@@ -4839,8 +5584,8 @@
         </p:nvSpPr>
         <p:spPr>
           <a:xfrm>
-            <a:off x="731520" y="1188720"/>
-            <a:ext cx="10058400" cy="640080"/>
+            <a:off x="731520" y="1005840"/>
+            <a:ext cx="10058400" cy="548640"/>
           </a:xfrm>
           <a:prstGeom prst="rect">
             <a:avLst/>
@@ -4866,16 +5611,110 @@
           </a:p>
         </p:txBody>
       </p:sp>
-      <p:sp>
-        <p:nvSpPr>
-          <p:cNvPr id="5" name="TextBox 4"/>
+      <p:pic>
+        <p:nvPicPr>
+          <p:cNvPr id="5" name="Picture 4" descr="happy.png"/>
+          <p:cNvPicPr>
+            <a:picLocks noChangeAspect="1"/>
+          </p:cNvPicPr>
+          <p:nvPr/>
+        </p:nvPicPr>
+        <p:blipFill>
+          <a:blip r:embed="rId2"/>
+          <a:stretch>
+            <a:fillRect/>
+          </a:stretch>
+        </p:blipFill>
+        <p:spPr>
+          <a:xfrm>
+            <a:off x="731520" y="1645920"/>
+            <a:ext cx="1371600" cy="1371600"/>
+          </a:xfrm>
+          <a:prstGeom prst="rect">
+            <a:avLst/>
+          </a:prstGeom>
+        </p:spPr>
+      </p:pic>
+      <p:pic>
+        <p:nvPicPr>
+          <p:cNvPr id="6" name="Picture 5" descr="angry.png"/>
+          <p:cNvPicPr>
+            <a:picLocks noChangeAspect="1"/>
+          </p:cNvPicPr>
+          <p:nvPr/>
+        </p:nvPicPr>
+        <p:blipFill>
+          <a:blip r:embed="rId3"/>
+          <a:stretch>
+            <a:fillRect/>
+          </a:stretch>
+        </p:blipFill>
+        <p:spPr>
+          <a:xfrm>
+            <a:off x="2377440" y="1645920"/>
+            <a:ext cx="1371600" cy="1371600"/>
+          </a:xfrm>
+          <a:prstGeom prst="rect">
+            <a:avLst/>
+          </a:prstGeom>
+        </p:spPr>
+      </p:pic>
+      <p:sp>
+        <p:nvSpPr>
+          <p:cNvPr id="7" name="Rounded Rectangle 6"/>
+          <p:cNvSpPr/>
+          <p:nvPr/>
+        </p:nvSpPr>
+        <p:spPr>
+          <a:xfrm>
+            <a:off x="4023360" y="1645920"/>
+            <a:ext cx="1371600" cy="1371600"/>
+          </a:xfrm>
+          <a:prstGeom prst="roundRect">
+            <a:avLst/>
+          </a:prstGeom>
+          <a:solidFill>
+            <a:srgbClr val="202A44"/>
+          </a:solidFill>
+          <a:ln w="19050">
+            <a:solidFill>
+              <a:srgbClr val="8892B0"/>
+            </a:solidFill>
+          </a:ln>
+          <a:effectLst/>
+        </p:spPr>
+        <p:style>
+          <a:lnRef idx="1">
+            <a:schemeClr val="accent1"/>
+          </a:lnRef>
+          <a:fillRef idx="3">
+            <a:schemeClr val="accent1"/>
+          </a:fillRef>
+          <a:effectRef idx="2">
+            <a:schemeClr val="accent1"/>
+          </a:effectRef>
+          <a:fontRef idx="minor">
+            <a:schemeClr val="lt1"/>
+          </a:fontRef>
+        </p:style>
+        <p:txBody>
+          <a:bodyPr rtlCol="0" anchor="ctr"/>
+          <a:lstStyle/>
+          <a:p>
+            <a:pPr algn="ctr"/>
+          </a:p>
+        </p:txBody>
+      </p:sp>
+      <p:sp>
+        <p:nvSpPr>
+          <p:cNvPr id="8" name="TextBox 7"/>
           <p:cNvSpPr txBox="1"/>
           <p:nvPr/>
         </p:nvSpPr>
         <p:spPr>
           <a:xfrm>
-            <a:off x="731520" y="1828800"/>
-            <a:ext cx="10515600" cy="4114800"/>
+            <a:off x="4023360" y="2057400"/>
+            <a:ext cx="1371600" cy="548640"/>
           </a:xfrm>
           <a:prstGeom prst="rect">
             <a:avLst/>
@@ -4888,11 +5727,212 @@
           </a:bodyPr>
           <a:lstStyle/>
           <a:p>
+            <a:pPr algn="ctr">
+              <a:defRPr sz="1400">
+                <a:solidFill>
+                  <a:srgbClr val="8892B0"/>
+                </a:solidFill>
+              </a:defRPr>
+            </a:pPr>
+            <a:r>
+              <a:t>😊 happy</a:t>
+            </a:r>
+          </a:p>
+        </p:txBody>
+      </p:sp>
+      <p:sp>
+        <p:nvSpPr>
+          <p:cNvPr id="9" name="Rounded Rectangle 8"/>
+          <p:cNvSpPr/>
+          <p:nvPr/>
+        </p:nvSpPr>
+        <p:spPr>
+          <a:xfrm>
+            <a:off x="731520" y="3291840"/>
+            <a:ext cx="3474720" cy="1645920"/>
+          </a:xfrm>
+          <a:prstGeom prst="roundRect">
+            <a:avLst/>
+          </a:prstGeom>
+          <a:solidFill>
+            <a:srgbClr val="202A44"/>
+          </a:solidFill>
+          <a:ln w="19050">
+            <a:solidFill>
+              <a:srgbClr val="8892B0"/>
+            </a:solidFill>
+          </a:ln>
+          <a:effectLst/>
+        </p:spPr>
+        <p:style>
+          <a:lnRef idx="1">
+            <a:schemeClr val="accent1"/>
+          </a:lnRef>
+          <a:fillRef idx="3">
+            <a:schemeClr val="accent1"/>
+          </a:fillRef>
+          <a:effectRef idx="2">
+            <a:schemeClr val="accent1"/>
+          </a:effectRef>
+          <a:fontRef idx="minor">
+            <a:schemeClr val="lt1"/>
+          </a:fontRef>
+        </p:style>
+        <p:txBody>
+          <a:bodyPr rtlCol="0" anchor="ctr"/>
+          <a:lstStyle/>
+          <a:p>
+            <a:pPr algn="ctr"/>
+          </a:p>
+        </p:txBody>
+      </p:sp>
+      <p:sp>
+        <p:nvSpPr>
+          <p:cNvPr id="10" name="TextBox 9"/>
+          <p:cNvSpPr txBox="1"/>
+          <p:nvPr/>
+        </p:nvSpPr>
+        <p:spPr>
+          <a:xfrm>
+            <a:off x="731520" y="3840480"/>
+            <a:ext cx="3474720" cy="548640"/>
+          </a:xfrm>
+          <a:prstGeom prst="rect">
+            <a:avLst/>
+          </a:prstGeom>
+          <a:noFill/>
+        </p:spPr>
+        <p:txBody>
+          <a:bodyPr wrap="square">
+            <a:spAutoFit/>
+          </a:bodyPr>
+          <a:lstStyle/>
+          <a:p>
+            <a:pPr algn="ctr">
+              <a:defRPr sz="1400">
+                <a:solidFill>
+                  <a:srgbClr val="8892B0"/>
+                </a:solidFill>
+              </a:defRPr>
+            </a:pPr>
+            <a:r>
+              <a:t>📸 ESP32 实物照片</a:t>
+            </a:r>
+          </a:p>
+        </p:txBody>
+      </p:sp>
+      <p:sp>
+        <p:nvSpPr>
+          <p:cNvPr id="11" name="Rounded Rectangle 10"/>
+          <p:cNvSpPr/>
+          <p:nvPr/>
+        </p:nvSpPr>
+        <p:spPr>
+          <a:xfrm>
+            <a:off x="4389120" y="3291840"/>
+            <a:ext cx="1828800" cy="3108960"/>
+          </a:xfrm>
+          <a:prstGeom prst="roundRect">
+            <a:avLst/>
+          </a:prstGeom>
+          <a:solidFill>
+            <a:srgbClr val="202A44"/>
+          </a:solidFill>
+          <a:ln w="19050">
+            <a:solidFill>
+              <a:srgbClr val="8892B0"/>
+            </a:solidFill>
+          </a:ln>
+          <a:effectLst/>
+        </p:spPr>
+        <p:style>
+          <a:lnRef idx="1">
+            <a:schemeClr val="accent1"/>
+          </a:lnRef>
+          <a:fillRef idx="3">
+            <a:schemeClr val="accent1"/>
+          </a:fillRef>
+          <a:effectRef idx="2">
+            <a:schemeClr val="accent1"/>
+          </a:effectRef>
+          <a:fontRef idx="minor">
+            <a:schemeClr val="lt1"/>
+          </a:fontRef>
+        </p:style>
+        <p:txBody>
+          <a:bodyPr rtlCol="0" anchor="ctr"/>
+          <a:lstStyle/>
+          <a:p>
+            <a:pPr algn="ctr"/>
+          </a:p>
+        </p:txBody>
+      </p:sp>
+      <p:sp>
+        <p:nvSpPr>
+          <p:cNvPr id="12" name="TextBox 11"/>
+          <p:cNvSpPr txBox="1"/>
+          <p:nvPr/>
+        </p:nvSpPr>
+        <p:spPr>
+          <a:xfrm>
+            <a:off x="4389120" y="4572000"/>
+            <a:ext cx="1828800" cy="548640"/>
+          </a:xfrm>
+          <a:prstGeom prst="rect">
+            <a:avLst/>
+          </a:prstGeom>
+          <a:noFill/>
+        </p:spPr>
+        <p:txBody>
+          <a:bodyPr wrap="square">
+            <a:spAutoFit/>
+          </a:bodyPr>
+          <a:lstStyle/>
+          <a:p>
+            <a:pPr algn="ctr">
+              <a:defRPr sz="1400">
+                <a:solidFill>
+                  <a:srgbClr val="8892B0"/>
+                </a:solidFill>
+              </a:defRPr>
+            </a:pPr>
+            <a:r>
+              <a:t>📸 8×8 矩阵</a:t>
+            </a:r>
+            <a:br/>
+            <a:r>
+              <a:t>像素表情</a:t>
+            </a:r>
+          </a:p>
+        </p:txBody>
+      </p:sp>
+      <p:sp>
+        <p:nvSpPr>
+          <p:cNvPr id="13" name="TextBox 12"/>
+          <p:cNvSpPr txBox="1"/>
+          <p:nvPr/>
+        </p:nvSpPr>
+        <p:spPr>
+          <a:xfrm>
+            <a:off x="6583680" y="1463040"/>
+            <a:ext cx="5029200" cy="4572000"/>
+          </a:xfrm>
+          <a:prstGeom prst="rect">
+            <a:avLst/>
+          </a:prstGeom>
+          <a:noFill/>
+        </p:spPr>
+        <p:txBody>
+          <a:bodyPr wrap="square">
+            <a:spAutoFit/>
+          </a:bodyPr>
+          <a:lstStyle/>
+          <a:p>
             <a:pPr>
               <a:spcAft>
-                <a:spcPts val="800"/>
+                <a:spcPts val="600"/>
               </a:spcAft>
-              <a:defRPr sz="1600">
+              <a:defRPr sz="1400">
                 <a:solidFill>
                   <a:srgbClr val="E0E0E0"/>
                 </a:solidFill>
@@ -4905,9 +5945,9 @@
           <a:p>
             <a:pPr>
               <a:spcAft>
-                <a:spcPts val="800"/>
+                <a:spcPts val="600"/>
               </a:spcAft>
-              <a:defRPr sz="1600">
+              <a:defRPr sz="1400">
                 <a:solidFill>
                   <a:srgbClr val="E0E0E0"/>
                 </a:solidFill>
@@ -4920,9 +5960,9 @@
           <a:p>
             <a:pPr>
               <a:spcAft>
-                <a:spcPts val="800"/>
+                <a:spcPts val="600"/>
               </a:spcAft>
-              <a:defRPr sz="1600">
+              <a:defRPr sz="1400">
                 <a:solidFill>
                   <a:srgbClr val="E0E0E0"/>
                 </a:solidFill>
@@ -4935,9 +5975,9 @@
           <a:p>
             <a:pPr>
               <a:spcAft>
-                <a:spcPts val="800"/>
+                <a:spcPts val="600"/>
               </a:spcAft>
-              <a:defRPr sz="1600">
+              <a:defRPr sz="1400">
                 <a:solidFill>
                   <a:srgbClr val="E0E0E0"/>
                 </a:solidFill>
@@ -4950,9 +5990,9 @@
           <a:p>
             <a:pPr>
               <a:spcAft>
-                <a:spcPts val="800"/>
+                <a:spcPts val="600"/>
               </a:spcAft>
-              <a:defRPr sz="1600">
+              <a:defRPr sz="1400">
                 <a:solidFill>
                   <a:srgbClr val="E0E0E0"/>
                 </a:solidFill>
@@ -4965,9 +6005,9 @@
           <a:p>
             <a:pPr>
               <a:spcAft>
-                <a:spcPts val="800"/>
+                <a:spcPts val="600"/>
               </a:spcAft>
-              <a:defRPr sz="1600">
+              <a:defRPr sz="1400">
                 <a:solidFill>
                   <a:srgbClr val="E0E0E0"/>
                 </a:solidFill>
@@ -4977,9 +6017,9 @@
           <a:p>
             <a:pPr>
               <a:spcAft>
-                <a:spcPts val="800"/>
+                <a:spcPts val="600"/>
               </a:spcAft>
-              <a:defRPr sz="1600">
+              <a:defRPr sz="1400">
                 <a:solidFill>
                   <a:srgbClr val="E0E0E0"/>
                 </a:solidFill>
@@ -4992,51 +6032,24 @@
           <a:p>
             <a:pPr>
               <a:spcAft>
-                <a:spcPts val="800"/>
+                <a:spcPts val="600"/>
               </a:spcAft>
-              <a:defRPr sz="1600">
+              <a:defRPr sz="1400">
                 <a:solidFill>
                   <a:srgbClr val="E0E0E0"/>
                 </a:solidFill>
               </a:defRPr>
             </a:pPr>
             <a:r>
-              <a:t>   GET /timer?m=25&amp;s=00 → 两数字+冒号闪烁</a:t>
+              <a:t>🌐 WiFi AP 模式 — SSID: FocusBuddy</a:t>
             </a:r>
           </a:p>
           <a:p>
             <a:pPr>
               <a:spcAft>
-                <a:spcPts val="800"/>
+                <a:spcPts val="600"/>
               </a:spcAft>
-              <a:defRPr sz="1600">
-                <a:solidFill>
-                  <a:srgbClr val="E0E0E0"/>
-                </a:solidFill>
-              </a:defRPr>
-            </a:pPr>
-          </a:p>
-          <a:p>
-            <a:pPr>
-              <a:spcAft>
-                <a:spcPts val="800"/>
-              </a:spcAft>
-              <a:defRPr sz="1600">
-                <a:solidFill>
-                  <a:srgbClr val="E0E0E0"/>
-                </a:solidFill>
-              </a:defRPr>
-            </a:pPr>
-            <a:r>
-              <a:t>🌐 WiFi AP 模式 — SSID: FocusBuddy / IP: 10.10.10.1</a:t>
-            </a:r>
-          </a:p>
-          <a:p>
-            <a:pPr>
-              <a:spcAft>
-                <a:spcPts val="800"/>
-              </a:spcAft>
-              <a:defRPr sz="1600">
+              <a:defRPr sz="1400">
                 <a:solidFill>
                   <a:srgbClr val="E0E0E0"/>
                 </a:solidFill>
@@ -5161,8 +6174,8 @@
         </p:nvSpPr>
         <p:spPr>
           <a:xfrm>
-            <a:off x="731520" y="1188720"/>
-            <a:ext cx="10058400" cy="640080"/>
+            <a:off x="731520" y="1005840"/>
+            <a:ext cx="10058400" cy="548640"/>
           </a:xfrm>
           <a:prstGeom prst="rect">
             <a:avLst/>
@@ -5183,7 +6196,7 @@
               </a:defRPr>
             </a:pPr>
             <a:r>
-              <a:t>全栈架构：原生 JS × MediaPipe × ESP32</a:t>
+              <a:t>全栈架构：原生 JS × MediaPipe × ESP32 — 零框架、零后端</a:t>
             </a:r>
           </a:p>
         </p:txBody>
@@ -5196,7 +6209,7 @@
         </p:nvSpPr>
         <p:spPr>
           <a:xfrm>
-            <a:off x="731520" y="1828800"/>
+            <a:off x="731520" y="1645920"/>
             <a:ext cx="5303520" cy="4572000"/>
           </a:xfrm>
           <a:prstGeom prst="rect">
@@ -5381,7 +6394,7 @@
         </p:nvSpPr>
         <p:spPr>
           <a:xfrm>
-            <a:off x="6400800" y="1828800"/>
+            <a:off x="6400800" y="1645920"/>
             <a:ext cx="5303520" cy="4572000"/>
           </a:xfrm>
           <a:prstGeom prst="rect">
@@ -5569,6 +6582,87 @@
             </a:pPr>
             <a:r>
               <a:t>  · GET /status (JSON)</a:t>
+            </a:r>
+          </a:p>
+        </p:txBody>
+      </p:sp>
+      <p:sp>
+        <p:nvSpPr>
+          <p:cNvPr id="7" name="Rounded Rectangle 6"/>
+          <p:cNvSpPr/>
+          <p:nvPr/>
+        </p:nvSpPr>
+        <p:spPr>
+          <a:xfrm>
+            <a:off x="731520" y="4206240"/>
+            <a:ext cx="10698480" cy="2194560"/>
+          </a:xfrm>
+          <a:prstGeom prst="roundRect">
+            <a:avLst/>
+          </a:prstGeom>
+          <a:solidFill>
+            <a:srgbClr val="202A44"/>
+          </a:solidFill>
+          <a:ln w="19050">
+            <a:solidFill>
+              <a:srgbClr val="8892B0"/>
+            </a:solidFill>
+          </a:ln>
+          <a:effectLst/>
+        </p:spPr>
+        <p:style>
+          <a:lnRef idx="1">
+            <a:schemeClr val="accent1"/>
+          </a:lnRef>
+          <a:fillRef idx="3">
+            <a:schemeClr val="accent1"/>
+          </a:fillRef>
+          <a:effectRef idx="2">
+            <a:schemeClr val="accent1"/>
+          </a:effectRef>
+          <a:fontRef idx="minor">
+            <a:schemeClr val="lt1"/>
+          </a:fontRef>
+        </p:style>
+        <p:txBody>
+          <a:bodyPr rtlCol="0" anchor="ctr"/>
+          <a:lstStyle/>
+          <a:p>
+            <a:pPr algn="ctr"/>
+          </a:p>
+        </p:txBody>
+      </p:sp>
+      <p:sp>
+        <p:nvSpPr>
+          <p:cNvPr id="8" name="TextBox 7"/>
+          <p:cNvSpPr txBox="1"/>
+          <p:nvPr/>
+        </p:nvSpPr>
+        <p:spPr>
+          <a:xfrm>
+            <a:off x="731520" y="5029200"/>
+            <a:ext cx="10698480" cy="548640"/>
+          </a:xfrm>
+          <a:prstGeom prst="rect">
+            <a:avLst/>
+          </a:prstGeom>
+          <a:noFill/>
+        </p:spPr>
+        <p:txBody>
+          <a:bodyPr wrap="square">
+            <a:spAutoFit/>
+          </a:bodyPr>
+          <a:lstStyle/>
+          <a:p>
+            <a:pPr algn="ctr">
+              <a:defRPr sz="1400">
+                <a:solidFill>
+                  <a:srgbClr val="8892B0"/>
+                </a:solidFill>
+              </a:defRPr>
+            </a:pPr>
+            <a:r>
+              <a:t>📸 系统架构图 (浏览器 → FaceMesh → ESP32 → WebSocket)</a:t>
             </a:r>
           </a:p>
         </p:txBody>
@@ -7450,8 +8544,8 @@
         </p:nvSpPr>
         <p:spPr>
           <a:xfrm>
-            <a:off x="731520" y="1371600"/>
-            <a:ext cx="10058400" cy="914400"/>
+            <a:off x="731520" y="1097280"/>
+            <a:ext cx="10058400" cy="640080"/>
           </a:xfrm>
           <a:prstGeom prst="rect">
             <a:avLst/>
@@ -7485,8 +8579,8 @@
         </p:nvSpPr>
         <p:spPr>
           <a:xfrm>
-            <a:off x="731520" y="2286000"/>
-            <a:ext cx="10515600" cy="4114800"/>
+            <a:off x="731520" y="1737360"/>
+            <a:ext cx="6400800" cy="4572000"/>
           </a:xfrm>
           <a:prstGeom prst="rect">
             <a:avLst/>
@@ -7501,9 +8595,9 @@
           <a:p>
             <a:pPr>
               <a:spcAft>
-                <a:spcPts val="800"/>
+                <a:spcPts val="600"/>
               </a:spcAft>
-              <a:defRPr sz="1600">
+              <a:defRPr sz="1500">
                 <a:solidFill>
                   <a:srgbClr val="E0E0E0"/>
                 </a:solidFill>
@@ -7516,9 +8610,9 @@
           <a:p>
             <a:pPr>
               <a:spcAft>
-                <a:spcPts val="800"/>
+                <a:spcPts val="600"/>
               </a:spcAft>
-              <a:defRPr sz="1600">
+              <a:defRPr sz="1500">
                 <a:solidFill>
                   <a:srgbClr val="E0E0E0"/>
                 </a:solidFill>
@@ -7531,9 +8625,9 @@
           <a:p>
             <a:pPr>
               <a:spcAft>
-                <a:spcPts val="800"/>
+                <a:spcPts val="600"/>
               </a:spcAft>
-              <a:defRPr sz="1600">
+              <a:defRPr sz="1500">
                 <a:solidFill>
                   <a:srgbClr val="E0E0E0"/>
                 </a:solidFill>
@@ -7546,9 +8640,9 @@
           <a:p>
             <a:pPr>
               <a:spcAft>
-                <a:spcPts val="800"/>
+                <a:spcPts val="600"/>
               </a:spcAft>
-              <a:defRPr sz="1600">
+              <a:defRPr sz="1500">
                 <a:solidFill>
                   <a:srgbClr val="E0E0E0"/>
                 </a:solidFill>
@@ -7561,9 +8655,9 @@
           <a:p>
             <a:pPr>
               <a:spcAft>
-                <a:spcPts val="800"/>
+                <a:spcPts val="600"/>
               </a:spcAft>
-              <a:defRPr sz="1600">
+              <a:defRPr sz="1500">
                 <a:solidFill>
                   <a:srgbClr val="E0E0E0"/>
                 </a:solidFill>
@@ -7576,9 +8670,9 @@
           <a:p>
             <a:pPr>
               <a:spcAft>
-                <a:spcPts val="800"/>
+                <a:spcPts val="600"/>
               </a:spcAft>
-              <a:defRPr sz="1600">
+              <a:defRPr sz="1500">
                 <a:solidFill>
                   <a:srgbClr val="E0E0E0"/>
                 </a:solidFill>
@@ -7591,9 +8685,9 @@
           <a:p>
             <a:pPr>
               <a:spcAft>
-                <a:spcPts val="800"/>
+                <a:spcPts val="600"/>
               </a:spcAft>
-              <a:defRPr sz="1600">
+              <a:defRPr sz="1500">
                 <a:solidFill>
                   <a:srgbClr val="E0E0E0"/>
                 </a:solidFill>
@@ -7606,9 +8700,9 @@
           <a:p>
             <a:pPr>
               <a:spcAft>
-                <a:spcPts val="800"/>
+                <a:spcPts val="600"/>
               </a:spcAft>
-              <a:defRPr sz="1600">
+              <a:defRPr sz="1500">
                 <a:solidFill>
                   <a:srgbClr val="E0E0E0"/>
                 </a:solidFill>
@@ -7618,9 +8712,9 @@
           <a:p>
             <a:pPr>
               <a:spcAft>
-                <a:spcPts val="800"/>
+                <a:spcPts val="600"/>
               </a:spcAft>
-              <a:defRPr sz="1600">
+              <a:defRPr sz="1500">
                 <a:solidFill>
                   <a:srgbClr val="E0E0E0"/>
                 </a:solidFill>
@@ -7628,6 +8722,168 @@
             </a:pPr>
             <a:r>
               <a:t>💡 备用方案：如现场网络卡顿，播放录屏</a:t>
+            </a:r>
+          </a:p>
+        </p:txBody>
+      </p:sp>
+      <p:sp>
+        <p:nvSpPr>
+          <p:cNvPr id="6" name="Rounded Rectangle 5"/>
+          <p:cNvSpPr/>
+          <p:nvPr/>
+        </p:nvSpPr>
+        <p:spPr>
+          <a:xfrm>
+            <a:off x="7498079" y="1645920"/>
+            <a:ext cx="4206240" cy="2560320"/>
+          </a:xfrm>
+          <a:prstGeom prst="roundRect">
+            <a:avLst/>
+          </a:prstGeom>
+          <a:solidFill>
+            <a:srgbClr val="202A44"/>
+          </a:solidFill>
+          <a:ln w="19050">
+            <a:solidFill>
+              <a:srgbClr val="8892B0"/>
+            </a:solidFill>
+          </a:ln>
+          <a:effectLst/>
+        </p:spPr>
+        <p:style>
+          <a:lnRef idx="1">
+            <a:schemeClr val="accent1"/>
+          </a:lnRef>
+          <a:fillRef idx="3">
+            <a:schemeClr val="accent1"/>
+          </a:fillRef>
+          <a:effectRef idx="2">
+            <a:schemeClr val="accent1"/>
+          </a:effectRef>
+          <a:fontRef idx="minor">
+            <a:schemeClr val="lt1"/>
+          </a:fontRef>
+        </p:style>
+        <p:txBody>
+          <a:bodyPr rtlCol="0" anchor="ctr"/>
+          <a:lstStyle/>
+          <a:p>
+            <a:pPr algn="ctr"/>
+          </a:p>
+        </p:txBody>
+      </p:sp>
+      <p:sp>
+        <p:nvSpPr>
+          <p:cNvPr id="7" name="TextBox 6"/>
+          <p:cNvSpPr txBox="1"/>
+          <p:nvPr/>
+        </p:nvSpPr>
+        <p:spPr>
+          <a:xfrm>
+            <a:off x="7498079" y="2651760"/>
+            <a:ext cx="4206240" cy="548640"/>
+          </a:xfrm>
+          <a:prstGeom prst="rect">
+            <a:avLst/>
+          </a:prstGeom>
+          <a:noFill/>
+        </p:spPr>
+        <p:txBody>
+          <a:bodyPr wrap="square">
+            <a:spAutoFit/>
+          </a:bodyPr>
+          <a:lstStyle/>
+          <a:p>
+            <a:pPr algn="ctr">
+              <a:defRPr sz="1400">
+                <a:solidFill>
+                  <a:srgbClr val="8892B0"/>
+                </a:solidFill>
+              </a:defRPr>
+            </a:pPr>
+            <a:r>
+              <a:t>🎥 演示视频截图</a:t>
+            </a:r>
+          </a:p>
+        </p:txBody>
+      </p:sp>
+      <p:sp>
+        <p:nvSpPr>
+          <p:cNvPr id="8" name="Rounded Rectangle 7"/>
+          <p:cNvSpPr/>
+          <p:nvPr/>
+        </p:nvSpPr>
+        <p:spPr>
+          <a:xfrm>
+            <a:off x="7498079" y="4389120"/>
+            <a:ext cx="4206240" cy="2011680"/>
+          </a:xfrm>
+          <a:prstGeom prst="roundRect">
+            <a:avLst/>
+          </a:prstGeom>
+          <a:solidFill>
+            <a:srgbClr val="202A44"/>
+          </a:solidFill>
+          <a:ln w="19050">
+            <a:solidFill>
+              <a:srgbClr val="8892B0"/>
+            </a:solidFill>
+          </a:ln>
+          <a:effectLst/>
+        </p:spPr>
+        <p:style>
+          <a:lnRef idx="1">
+            <a:schemeClr val="accent1"/>
+          </a:lnRef>
+          <a:fillRef idx="3">
+            <a:schemeClr val="accent1"/>
+          </a:fillRef>
+          <a:effectRef idx="2">
+            <a:schemeClr val="accent1"/>
+          </a:effectRef>
+          <a:fontRef idx="minor">
+            <a:schemeClr val="lt1"/>
+          </a:fontRef>
+        </p:style>
+        <p:txBody>
+          <a:bodyPr rtlCol="0" anchor="ctr"/>
+          <a:lstStyle/>
+          <a:p>
+            <a:pPr algn="ctr"/>
+          </a:p>
+        </p:txBody>
+      </p:sp>
+      <p:sp>
+        <p:nvSpPr>
+          <p:cNvPr id="9" name="TextBox 8"/>
+          <p:cNvSpPr txBox="1"/>
+          <p:nvPr/>
+        </p:nvSpPr>
+        <p:spPr>
+          <a:xfrm>
+            <a:off x="7498079" y="5120640"/>
+            <a:ext cx="4206240" cy="548640"/>
+          </a:xfrm>
+          <a:prstGeom prst="rect">
+            <a:avLst/>
+          </a:prstGeom>
+          <a:noFill/>
+        </p:spPr>
+        <p:txBody>
+          <a:bodyPr wrap="square">
+            <a:spAutoFit/>
+          </a:bodyPr>
+          <a:lstStyle/>
+          <a:p>
+            <a:pPr algn="ctr">
+              <a:defRPr sz="1400">
+                <a:solidFill>
+                  <a:srgbClr val="8892B0"/>
+                </a:solidFill>
+              </a:defRPr>
+            </a:pPr>
+            <a:r>
+              <a:t>📊 统计页面截图</a:t>
             </a:r>
           </a:p>
         </p:txBody>
@@ -7732,7 +8988,7 @@
               </a:defRPr>
             </a:pPr>
             <a:r>
-              <a:t>未来规划</a:t>
+              <a:t>数据展示</a:t>
             </a:r>
           </a:p>
         </p:txBody>
@@ -7745,8 +9001,8 @@
         </p:nvSpPr>
         <p:spPr>
           <a:xfrm>
-            <a:off x="731520" y="1371600"/>
-            <a:ext cx="10058400" cy="731520"/>
+            <a:off x="731520" y="1097280"/>
+            <a:ext cx="10058400" cy="548640"/>
           </a:xfrm>
           <a:prstGeom prst="rect">
             <a:avLst/>
@@ -7760,28 +9016,72 @@
           <a:lstStyle/>
           <a:p>
             <a:pPr algn="l">
-              <a:defRPr sz="2800" b="1">
+              <a:defRPr sz="2400" b="1">
                 <a:solidFill>
                   <a:srgbClr val="FF6B35"/>
                 </a:solidFill>
               </a:defRPr>
             </a:pPr>
             <a:r>
-              <a:t>从个人工具到学习生态</a:t>
-            </a:r>
-          </a:p>
-        </p:txBody>
-      </p:sp>
-      <p:sp>
-        <p:nvSpPr>
-          <p:cNvPr id="5" name="TextBox 4"/>
+              <a:t>📊 专注数据比你想象的更直观</a:t>
+            </a:r>
+          </a:p>
+        </p:txBody>
+      </p:sp>
+      <p:sp>
+        <p:nvSpPr>
+          <p:cNvPr id="5" name="Rounded Rectangle 4"/>
+          <p:cNvSpPr/>
+          <p:nvPr/>
+        </p:nvSpPr>
+        <p:spPr>
+          <a:xfrm>
+            <a:off x="731520" y="1828800"/>
+            <a:ext cx="2560320" cy="1371600"/>
+          </a:xfrm>
+          <a:prstGeom prst="roundRect">
+            <a:avLst/>
+          </a:prstGeom>
+          <a:solidFill>
+            <a:srgbClr val="1E2A44"/>
+          </a:solidFill>
+          <a:ln>
+            <a:noFill/>
+          </a:ln>
+          <a:effectLst/>
+        </p:spPr>
+        <p:style>
+          <a:lnRef idx="1">
+            <a:schemeClr val="accent1"/>
+          </a:lnRef>
+          <a:fillRef idx="3">
+            <a:schemeClr val="accent1"/>
+          </a:fillRef>
+          <a:effectRef idx="2">
+            <a:schemeClr val="accent1"/>
+          </a:effectRef>
+          <a:fontRef idx="minor">
+            <a:schemeClr val="lt1"/>
+          </a:fontRef>
+        </p:style>
+        <p:txBody>
+          <a:bodyPr rtlCol="0" anchor="ctr"/>
+          <a:lstStyle/>
+          <a:p>
+            <a:pPr algn="ctr"/>
+          </a:p>
+        </p:txBody>
+      </p:sp>
+      <p:sp>
+        <p:nvSpPr>
+          <p:cNvPr id="6" name="TextBox 5"/>
           <p:cNvSpPr txBox="1"/>
           <p:nvPr/>
         </p:nvSpPr>
         <p:spPr>
           <a:xfrm>
-            <a:off x="731520" y="2286000"/>
-            <a:ext cx="10515600" cy="4114800"/>
+            <a:off x="914400" y="1920240"/>
+            <a:ext cx="2194560" cy="365760"/>
           </a:xfrm>
           <a:prstGeom prst="rect">
             <a:avLst/>
@@ -7794,105 +9094,694 @@
           </a:bodyPr>
           <a:lstStyle/>
           <a:p>
-            <a:pPr>
-              <a:spcAft>
-                <a:spcPts val="800"/>
-              </a:spcAft>
-              <a:defRPr sz="1600">
-                <a:solidFill>
-                  <a:srgbClr val="E0E0E0"/>
-                </a:solidFill>
-              </a:defRPr>
-            </a:pPr>
-            <a:r>
-              <a:t>🌐 多用户联机自习室 — 看到朋友也在专注，互相监督</a:t>
-            </a:r>
-          </a:p>
-          <a:p>
-            <a:pPr>
-              <a:spcAft>
-                <a:spcPts val="800"/>
-              </a:spcAft>
-              <a:defRPr sz="1600">
-                <a:solidFill>
-                  <a:srgbClr val="E0E0E0"/>
-                </a:solidFill>
-              </a:defRPr>
-            </a:pPr>
-            <a:r>
-              <a:t>😪 疲劳检测 — 加入打哈欠检测(MAR)，建议休息</a:t>
-            </a:r>
-          </a:p>
-          <a:p>
-            <a:pPr>
-              <a:spcAft>
-                <a:spcPts val="800"/>
-              </a:spcAft>
-              <a:defRPr sz="1600">
-                <a:solidFill>
-                  <a:srgbClr val="E0E0E0"/>
-                </a:solidFill>
-              </a:defRPr>
-            </a:pPr>
-            <a:r>
-              <a:t>🤖 AI 学习报告 — 每天自动生成专注分析+建议</a:t>
-            </a:r>
-          </a:p>
-          <a:p>
-            <a:pPr>
-              <a:spcAft>
-                <a:spcPts val="800"/>
-              </a:spcAft>
-              <a:defRPr sz="1600">
-                <a:solidFill>
-                  <a:srgbClr val="E0E0E0"/>
-                </a:solidFill>
-              </a:defRPr>
-            </a:pPr>
-            <a:r>
-              <a:t>📱 移动端适配 — 手机+平板上线</a:t>
-            </a:r>
-          </a:p>
-          <a:p>
-            <a:pPr>
-              <a:spcAft>
-                <a:spcPts val="800"/>
-              </a:spcAft>
-              <a:defRPr sz="1600">
-                <a:solidFill>
-                  <a:srgbClr val="E0E0E0"/>
-                </a:solidFill>
-              </a:defRPr>
-            </a:pPr>
-            <a:r>
-              <a:t>🔗 更丰富的硬件联动 — 震动提醒、光线提示</a:t>
-            </a:r>
-          </a:p>
-          <a:p>
-            <a:pPr>
-              <a:spcAft>
-                <a:spcPts val="800"/>
-              </a:spcAft>
-              <a:defRPr sz="1600">
-                <a:solidFill>
-                  <a:srgbClr val="E0E0E0"/>
-                </a:solidFill>
-              </a:defRPr>
-            </a:pPr>
-          </a:p>
-          <a:p>
-            <a:pPr>
-              <a:spcAft>
-                <a:spcPts val="800"/>
-              </a:spcAft>
-              <a:defRPr sz="1600">
-                <a:solidFill>
-                  <a:srgbClr val="E0E0E0"/>
-                </a:solidFill>
-              </a:defRPr>
-            </a:pPr>
-            <a:r>
-              <a:t>让 FocusBuddy 成为每个人桌面上的专注伙伴 🐱</a:t>
+            <a:pPr algn="l">
+              <a:defRPr sz="1400" b="0">
+                <a:solidFill>
+                  <a:srgbClr val="8892B0"/>
+                </a:solidFill>
+              </a:defRPr>
+            </a:pPr>
+            <a:r>
+              <a:t>今日专注</a:t>
+            </a:r>
+          </a:p>
+        </p:txBody>
+      </p:sp>
+      <p:sp>
+        <p:nvSpPr>
+          <p:cNvPr id="7" name="TextBox 6"/>
+          <p:cNvSpPr txBox="1"/>
+          <p:nvPr/>
+        </p:nvSpPr>
+        <p:spPr>
+          <a:xfrm>
+            <a:off x="914400" y="2240280"/>
+            <a:ext cx="2194560" cy="457200"/>
+          </a:xfrm>
+          <a:prstGeom prst="rect">
+            <a:avLst/>
+          </a:prstGeom>
+          <a:noFill/>
+        </p:spPr>
+        <p:txBody>
+          <a:bodyPr wrap="square">
+            <a:spAutoFit/>
+          </a:bodyPr>
+          <a:lstStyle/>
+          <a:p>
+            <a:pPr algn="l">
+              <a:defRPr sz="2800" b="1">
+                <a:solidFill>
+                  <a:srgbClr val="27AE60"/>
+                </a:solidFill>
+              </a:defRPr>
+            </a:pPr>
+            <a:r>
+              <a:t>00:32:15</a:t>
+            </a:r>
+          </a:p>
+        </p:txBody>
+      </p:sp>
+      <p:sp>
+        <p:nvSpPr>
+          <p:cNvPr id="8" name="TextBox 7"/>
+          <p:cNvSpPr txBox="1"/>
+          <p:nvPr/>
+        </p:nvSpPr>
+        <p:spPr>
+          <a:xfrm>
+            <a:off x="914400" y="2697480"/>
+            <a:ext cx="2194560" cy="365760"/>
+          </a:xfrm>
+          <a:prstGeom prst="rect">
+            <a:avLst/>
+          </a:prstGeom>
+          <a:noFill/>
+        </p:spPr>
+        <p:txBody>
+          <a:bodyPr wrap="square">
+            <a:spAutoFit/>
+          </a:bodyPr>
+          <a:lstStyle/>
+          <a:p>
+            <a:pPr algn="l">
+              <a:defRPr sz="1100" b="0">
+                <a:solidFill>
+                  <a:srgbClr val="8892B0"/>
+                </a:solidFill>
+              </a:defRPr>
+            </a:pPr>
+            <a:r>
+              <a:t>+15% 比昨天</a:t>
+            </a:r>
+          </a:p>
+        </p:txBody>
+      </p:sp>
+      <p:sp>
+        <p:nvSpPr>
+          <p:cNvPr id="9" name="Rounded Rectangle 8"/>
+          <p:cNvSpPr/>
+          <p:nvPr/>
+        </p:nvSpPr>
+        <p:spPr>
+          <a:xfrm>
+            <a:off x="3474720" y="1828800"/>
+            <a:ext cx="2560320" cy="1371600"/>
+          </a:xfrm>
+          <a:prstGeom prst="roundRect">
+            <a:avLst/>
+          </a:prstGeom>
+          <a:solidFill>
+            <a:srgbClr val="1E2A44"/>
+          </a:solidFill>
+          <a:ln>
+            <a:noFill/>
+          </a:ln>
+          <a:effectLst/>
+        </p:spPr>
+        <p:style>
+          <a:lnRef idx="1">
+            <a:schemeClr val="accent1"/>
+          </a:lnRef>
+          <a:fillRef idx="3">
+            <a:schemeClr val="accent1"/>
+          </a:fillRef>
+          <a:effectRef idx="2">
+            <a:schemeClr val="accent1"/>
+          </a:effectRef>
+          <a:fontRef idx="minor">
+            <a:schemeClr val="lt1"/>
+          </a:fontRef>
+        </p:style>
+        <p:txBody>
+          <a:bodyPr rtlCol="0" anchor="ctr"/>
+          <a:lstStyle/>
+          <a:p>
+            <a:pPr algn="ctr"/>
+          </a:p>
+        </p:txBody>
+      </p:sp>
+      <p:sp>
+        <p:nvSpPr>
+          <p:cNvPr id="10" name="TextBox 9"/>
+          <p:cNvSpPr txBox="1"/>
+          <p:nvPr/>
+        </p:nvSpPr>
+        <p:spPr>
+          <a:xfrm>
+            <a:off x="3657600" y="1920240"/>
+            <a:ext cx="2194560" cy="365760"/>
+          </a:xfrm>
+          <a:prstGeom prst="rect">
+            <a:avLst/>
+          </a:prstGeom>
+          <a:noFill/>
+        </p:spPr>
+        <p:txBody>
+          <a:bodyPr wrap="square">
+            <a:spAutoFit/>
+          </a:bodyPr>
+          <a:lstStyle/>
+          <a:p>
+            <a:pPr algn="l">
+              <a:defRPr sz="1400" b="0">
+                <a:solidFill>
+                  <a:srgbClr val="8892B0"/>
+                </a:solidFill>
+              </a:defRPr>
+            </a:pPr>
+            <a:r>
+              <a:t>走神次数</a:t>
+            </a:r>
+          </a:p>
+        </p:txBody>
+      </p:sp>
+      <p:sp>
+        <p:nvSpPr>
+          <p:cNvPr id="11" name="TextBox 10"/>
+          <p:cNvSpPr txBox="1"/>
+          <p:nvPr/>
+        </p:nvSpPr>
+        <p:spPr>
+          <a:xfrm>
+            <a:off x="3657600" y="2240280"/>
+            <a:ext cx="2194560" cy="457200"/>
+          </a:xfrm>
+          <a:prstGeom prst="rect">
+            <a:avLst/>
+          </a:prstGeom>
+          <a:noFill/>
+        </p:spPr>
+        <p:txBody>
+          <a:bodyPr wrap="square">
+            <a:spAutoFit/>
+          </a:bodyPr>
+          <a:lstStyle/>
+          <a:p>
+            <a:pPr algn="l">
+              <a:defRPr sz="2800" b="1">
+                <a:solidFill>
+                  <a:srgbClr val="E74C3C"/>
+                </a:solidFill>
+              </a:defRPr>
+            </a:pPr>
+            <a:r>
+              <a:t>12 次</a:t>
+            </a:r>
+          </a:p>
+        </p:txBody>
+      </p:sp>
+      <p:sp>
+        <p:nvSpPr>
+          <p:cNvPr id="12" name="TextBox 11"/>
+          <p:cNvSpPr txBox="1"/>
+          <p:nvPr/>
+        </p:nvSpPr>
+        <p:spPr>
+          <a:xfrm>
+            <a:off x="3657600" y="2697480"/>
+            <a:ext cx="2194560" cy="365760"/>
+          </a:xfrm>
+          <a:prstGeom prst="rect">
+            <a:avLst/>
+          </a:prstGeom>
+          <a:noFill/>
+        </p:spPr>
+        <p:txBody>
+          <a:bodyPr wrap="square">
+            <a:spAutoFit/>
+          </a:bodyPr>
+          <a:lstStyle/>
+          <a:p>
+            <a:pPr algn="l">
+              <a:defRPr sz="1100" b="0">
+                <a:solidFill>
+                  <a:srgbClr val="8892B0"/>
+                </a:solidFill>
+              </a:defRPr>
+            </a:pPr>
+            <a:r>
+              <a:t>平均 2.7min/次</a:t>
+            </a:r>
+          </a:p>
+        </p:txBody>
+      </p:sp>
+      <p:sp>
+        <p:nvSpPr>
+          <p:cNvPr id="13" name="Rounded Rectangle 12"/>
+          <p:cNvSpPr/>
+          <p:nvPr/>
+        </p:nvSpPr>
+        <p:spPr>
+          <a:xfrm>
+            <a:off x="6217920" y="1828800"/>
+            <a:ext cx="2560320" cy="1371600"/>
+          </a:xfrm>
+          <a:prstGeom prst="roundRect">
+            <a:avLst/>
+          </a:prstGeom>
+          <a:solidFill>
+            <a:srgbClr val="1E2A44"/>
+          </a:solidFill>
+          <a:ln>
+            <a:noFill/>
+          </a:ln>
+          <a:effectLst/>
+        </p:spPr>
+        <p:style>
+          <a:lnRef idx="1">
+            <a:schemeClr val="accent1"/>
+          </a:lnRef>
+          <a:fillRef idx="3">
+            <a:schemeClr val="accent1"/>
+          </a:fillRef>
+          <a:effectRef idx="2">
+            <a:schemeClr val="accent1"/>
+          </a:effectRef>
+          <a:fontRef idx="minor">
+            <a:schemeClr val="lt1"/>
+          </a:fontRef>
+        </p:style>
+        <p:txBody>
+          <a:bodyPr rtlCol="0" anchor="ctr"/>
+          <a:lstStyle/>
+          <a:p>
+            <a:pPr algn="ctr"/>
+          </a:p>
+        </p:txBody>
+      </p:sp>
+      <p:sp>
+        <p:nvSpPr>
+          <p:cNvPr id="14" name="TextBox 13"/>
+          <p:cNvSpPr txBox="1"/>
+          <p:nvPr/>
+        </p:nvSpPr>
+        <p:spPr>
+          <a:xfrm>
+            <a:off x="6400800" y="1920240"/>
+            <a:ext cx="2194560" cy="365760"/>
+          </a:xfrm>
+          <a:prstGeom prst="rect">
+            <a:avLst/>
+          </a:prstGeom>
+          <a:noFill/>
+        </p:spPr>
+        <p:txBody>
+          <a:bodyPr wrap="square">
+            <a:spAutoFit/>
+          </a:bodyPr>
+          <a:lstStyle/>
+          <a:p>
+            <a:pPr algn="l">
+              <a:defRPr sz="1400" b="0">
+                <a:solidFill>
+                  <a:srgbClr val="8892B0"/>
+                </a:solidFill>
+              </a:defRPr>
+            </a:pPr>
+            <a:r>
+              <a:t>番茄完成</a:t>
+            </a:r>
+          </a:p>
+        </p:txBody>
+      </p:sp>
+      <p:sp>
+        <p:nvSpPr>
+          <p:cNvPr id="15" name="TextBox 14"/>
+          <p:cNvSpPr txBox="1"/>
+          <p:nvPr/>
+        </p:nvSpPr>
+        <p:spPr>
+          <a:xfrm>
+            <a:off x="6400800" y="2240280"/>
+            <a:ext cx="2194560" cy="457200"/>
+          </a:xfrm>
+          <a:prstGeom prst="rect">
+            <a:avLst/>
+          </a:prstGeom>
+          <a:noFill/>
+        </p:spPr>
+        <p:txBody>
+          <a:bodyPr wrap="square">
+            <a:spAutoFit/>
+          </a:bodyPr>
+          <a:lstStyle/>
+          <a:p>
+            <a:pPr algn="l">
+              <a:defRPr sz="2800" b="1">
+                <a:solidFill>
+                  <a:srgbClr val="FF6B35"/>
+                </a:solidFill>
+              </a:defRPr>
+            </a:pPr>
+            <a:r>
+              <a:t>3/5 个</a:t>
+            </a:r>
+          </a:p>
+        </p:txBody>
+      </p:sp>
+      <p:sp>
+        <p:nvSpPr>
+          <p:cNvPr id="16" name="TextBox 15"/>
+          <p:cNvSpPr txBox="1"/>
+          <p:nvPr/>
+        </p:nvSpPr>
+        <p:spPr>
+          <a:xfrm>
+            <a:off x="6400800" y="2697480"/>
+            <a:ext cx="2194560" cy="365760"/>
+          </a:xfrm>
+          <a:prstGeom prst="rect">
+            <a:avLst/>
+          </a:prstGeom>
+          <a:noFill/>
+        </p:spPr>
+        <p:txBody>
+          <a:bodyPr wrap="square">
+            <a:spAutoFit/>
+          </a:bodyPr>
+          <a:lstStyle/>
+          <a:p>
+            <a:pPr algn="l">
+              <a:defRPr sz="1100" b="0">
+                <a:solidFill>
+                  <a:srgbClr val="8892B0"/>
+                </a:solidFill>
+              </a:defRPr>
+            </a:pPr>
+            <a:r>
+              <a:t>完成率 60%</a:t>
+            </a:r>
+          </a:p>
+        </p:txBody>
+      </p:sp>
+      <p:sp>
+        <p:nvSpPr>
+          <p:cNvPr id="17" name="Rounded Rectangle 16"/>
+          <p:cNvSpPr/>
+          <p:nvPr/>
+        </p:nvSpPr>
+        <p:spPr>
+          <a:xfrm>
+            <a:off x="8961120" y="1828800"/>
+            <a:ext cx="2560320" cy="1371600"/>
+          </a:xfrm>
+          <a:prstGeom prst="roundRect">
+            <a:avLst/>
+          </a:prstGeom>
+          <a:solidFill>
+            <a:srgbClr val="1E2A44"/>
+          </a:solidFill>
+          <a:ln>
+            <a:noFill/>
+          </a:ln>
+          <a:effectLst/>
+        </p:spPr>
+        <p:style>
+          <a:lnRef idx="1">
+            <a:schemeClr val="accent1"/>
+          </a:lnRef>
+          <a:fillRef idx="3">
+            <a:schemeClr val="accent1"/>
+          </a:fillRef>
+          <a:effectRef idx="2">
+            <a:schemeClr val="accent1"/>
+          </a:effectRef>
+          <a:fontRef idx="minor">
+            <a:schemeClr val="lt1"/>
+          </a:fontRef>
+        </p:style>
+        <p:txBody>
+          <a:bodyPr rtlCol="0" anchor="ctr"/>
+          <a:lstStyle/>
+          <a:p>
+            <a:pPr algn="ctr"/>
+          </a:p>
+        </p:txBody>
+      </p:sp>
+      <p:sp>
+        <p:nvSpPr>
+          <p:cNvPr id="18" name="TextBox 17"/>
+          <p:cNvSpPr txBox="1"/>
+          <p:nvPr/>
+        </p:nvSpPr>
+        <p:spPr>
+          <a:xfrm>
+            <a:off x="9144000" y="1920240"/>
+            <a:ext cx="2194560" cy="365760"/>
+          </a:xfrm>
+          <a:prstGeom prst="rect">
+            <a:avLst/>
+          </a:prstGeom>
+          <a:noFill/>
+        </p:spPr>
+        <p:txBody>
+          <a:bodyPr wrap="square">
+            <a:spAutoFit/>
+          </a:bodyPr>
+          <a:lstStyle/>
+          <a:p>
+            <a:pPr algn="l">
+              <a:defRPr sz="1400" b="0">
+                <a:solidFill>
+                  <a:srgbClr val="8892B0"/>
+                </a:solidFill>
+              </a:defRPr>
+            </a:pPr>
+            <a:r>
+              <a:t>专注率</a:t>
+            </a:r>
+          </a:p>
+        </p:txBody>
+      </p:sp>
+      <p:sp>
+        <p:nvSpPr>
+          <p:cNvPr id="19" name="TextBox 18"/>
+          <p:cNvSpPr txBox="1"/>
+          <p:nvPr/>
+        </p:nvSpPr>
+        <p:spPr>
+          <a:xfrm>
+            <a:off x="9144000" y="2240280"/>
+            <a:ext cx="2194560" cy="457200"/>
+          </a:xfrm>
+          <a:prstGeom prst="rect">
+            <a:avLst/>
+          </a:prstGeom>
+          <a:noFill/>
+        </p:spPr>
+        <p:txBody>
+          <a:bodyPr wrap="square">
+            <a:spAutoFit/>
+          </a:bodyPr>
+          <a:lstStyle/>
+          <a:p>
+            <a:pPr algn="l">
+              <a:defRPr sz="2800" b="1">
+                <a:solidFill>
+                  <a:srgbClr val="3498DB"/>
+                </a:solidFill>
+              </a:defRPr>
+            </a:pPr>
+            <a:r>
+              <a:t>68%</a:t>
+            </a:r>
+          </a:p>
+        </p:txBody>
+      </p:sp>
+      <p:sp>
+        <p:nvSpPr>
+          <p:cNvPr id="20" name="TextBox 19"/>
+          <p:cNvSpPr txBox="1"/>
+          <p:nvPr/>
+        </p:nvSpPr>
+        <p:spPr>
+          <a:xfrm>
+            <a:off x="9144000" y="2697480"/>
+            <a:ext cx="2194560" cy="365760"/>
+          </a:xfrm>
+          <a:prstGeom prst="rect">
+            <a:avLst/>
+          </a:prstGeom>
+          <a:noFill/>
+        </p:spPr>
+        <p:txBody>
+          <a:bodyPr wrap="square">
+            <a:spAutoFit/>
+          </a:bodyPr>
+          <a:lstStyle/>
+          <a:p>
+            <a:pPr algn="l">
+              <a:defRPr sz="1100" b="0">
+                <a:solidFill>
+                  <a:srgbClr val="8892B0"/>
+                </a:solidFill>
+              </a:defRPr>
+            </a:pPr>
+            <a:r>
+              <a:t>本周最高 82%</a:t>
+            </a:r>
+          </a:p>
+        </p:txBody>
+      </p:sp>
+      <p:sp>
+        <p:nvSpPr>
+          <p:cNvPr id="21" name="Rounded Rectangle 20"/>
+          <p:cNvSpPr/>
+          <p:nvPr/>
+        </p:nvSpPr>
+        <p:spPr>
+          <a:xfrm>
+            <a:off x="731520" y="3474720"/>
+            <a:ext cx="5303520" cy="2926080"/>
+          </a:xfrm>
+          <a:prstGeom prst="roundRect">
+            <a:avLst/>
+          </a:prstGeom>
+          <a:solidFill>
+            <a:srgbClr val="202A44"/>
+          </a:solidFill>
+          <a:ln w="19050">
+            <a:solidFill>
+              <a:srgbClr val="8892B0"/>
+            </a:solidFill>
+          </a:ln>
+          <a:effectLst/>
+        </p:spPr>
+        <p:style>
+          <a:lnRef idx="1">
+            <a:schemeClr val="accent1"/>
+          </a:lnRef>
+          <a:fillRef idx="3">
+            <a:schemeClr val="accent1"/>
+          </a:fillRef>
+          <a:effectRef idx="2">
+            <a:schemeClr val="accent1"/>
+          </a:effectRef>
+          <a:fontRef idx="minor">
+            <a:schemeClr val="lt1"/>
+          </a:fontRef>
+        </p:style>
+        <p:txBody>
+          <a:bodyPr rtlCol="0" anchor="ctr"/>
+          <a:lstStyle/>
+          <a:p>
+            <a:pPr algn="ctr"/>
+          </a:p>
+        </p:txBody>
+      </p:sp>
+      <p:sp>
+        <p:nvSpPr>
+          <p:cNvPr id="22" name="TextBox 21"/>
+          <p:cNvSpPr txBox="1"/>
+          <p:nvPr/>
+        </p:nvSpPr>
+        <p:spPr>
+          <a:xfrm>
+            <a:off x="731520" y="4663440"/>
+            <a:ext cx="5303520" cy="548640"/>
+          </a:xfrm>
+          <a:prstGeom prst="rect">
+            <a:avLst/>
+          </a:prstGeom>
+          <a:noFill/>
+        </p:spPr>
+        <p:txBody>
+          <a:bodyPr wrap="square">
+            <a:spAutoFit/>
+          </a:bodyPr>
+          <a:lstStyle/>
+          <a:p>
+            <a:pPr algn="ctr">
+              <a:defRPr sz="1400">
+                <a:solidFill>
+                  <a:srgbClr val="8892B0"/>
+                </a:solidFill>
+              </a:defRPr>
+            </a:pPr>
+            <a:r>
+              <a:t>📸 饼图：专注 vs 走神 vs 离开</a:t>
+            </a:r>
+          </a:p>
+        </p:txBody>
+      </p:sp>
+      <p:sp>
+        <p:nvSpPr>
+          <p:cNvPr id="23" name="Rounded Rectangle 22"/>
+          <p:cNvSpPr/>
+          <p:nvPr/>
+        </p:nvSpPr>
+        <p:spPr>
+          <a:xfrm>
+            <a:off x="6400800" y="3474720"/>
+            <a:ext cx="5303520" cy="2926080"/>
+          </a:xfrm>
+          <a:prstGeom prst="roundRect">
+            <a:avLst/>
+          </a:prstGeom>
+          <a:solidFill>
+            <a:srgbClr val="202A44"/>
+          </a:solidFill>
+          <a:ln w="19050">
+            <a:solidFill>
+              <a:srgbClr val="8892B0"/>
+            </a:solidFill>
+          </a:ln>
+          <a:effectLst/>
+        </p:spPr>
+        <p:style>
+          <a:lnRef idx="1">
+            <a:schemeClr val="accent1"/>
+          </a:lnRef>
+          <a:fillRef idx="3">
+            <a:schemeClr val="accent1"/>
+          </a:fillRef>
+          <a:effectRef idx="2">
+            <a:schemeClr val="accent1"/>
+          </a:effectRef>
+          <a:fontRef idx="minor">
+            <a:schemeClr val="lt1"/>
+          </a:fontRef>
+        </p:style>
+        <p:txBody>
+          <a:bodyPr rtlCol="0" anchor="ctr"/>
+          <a:lstStyle/>
+          <a:p>
+            <a:pPr algn="ctr"/>
+          </a:p>
+        </p:txBody>
+      </p:sp>
+      <p:sp>
+        <p:nvSpPr>
+          <p:cNvPr id="24" name="TextBox 23"/>
+          <p:cNvSpPr txBox="1"/>
+          <p:nvPr/>
+        </p:nvSpPr>
+        <p:spPr>
+          <a:xfrm>
+            <a:off x="6400800" y="4663440"/>
+            <a:ext cx="5303520" cy="548640"/>
+          </a:xfrm>
+          <a:prstGeom prst="rect">
+            <a:avLst/>
+          </a:prstGeom>
+          <a:noFill/>
+        </p:spPr>
+        <p:txBody>
+          <a:bodyPr wrap="square">
+            <a:spAutoFit/>
+          </a:bodyPr>
+          <a:lstStyle/>
+          <a:p>
+            <a:pPr algn="ctr">
+              <a:defRPr sz="1400">
+                <a:solidFill>
+                  <a:srgbClr val="8892B0"/>
+                </a:solidFill>
+              </a:defRPr>
+            </a:pPr>
+            <a:r>
+              <a:t>📸 柱状图：7天专注趋势</a:t>
             </a:r>
           </a:p>
         </p:txBody>
